--- a/project_16_medical_sensor_disease_prediction/presentations/project_presentation.pptx
+++ b/project_16_medical_sensor_disease_prediction/presentations/project_presentation.pptx
@@ -13,6 +13,13 @@
     <p:sldId id="261" r:id="rId12"/>
     <p:sldId id="262" r:id="rId13"/>
     <p:sldId id="263" r:id="rId14"/>
+    <p:sldId id="264" r:id="rId15"/>
+    <p:sldId id="265" r:id="rId16"/>
+    <p:sldId id="266" r:id="rId17"/>
+    <p:sldId id="267" r:id="rId18"/>
+    <p:sldId id="268" r:id="rId19"/>
+    <p:sldId id="269" r:id="rId20"/>
+    <p:sldId id="270" r:id="rId21"/>
   </p:sldIdLst>
   <p:sldSz cx="12191695" cy="6858000" type="screen4x3"/>
   <p:notesSz cx="6858000" cy="9144000"/>
@@ -3110,7 +3117,7 @@
             <a:avLst/>
           </a:prstGeom>
           <a:solidFill>
-            <a:srgbClr val="0F172A"/>
+            <a:srgbClr val="0B132B"/>
           </a:solidFill>
           <a:ln>
             <a:noFill/>
@@ -3146,8 +3153,8 @@
         </p:nvSpPr>
         <p:spPr>
           <a:xfrm>
-            <a:off x="1097280" y="1645920"/>
-            <a:ext cx="10058400" cy="3474720"/>
+            <a:off x="914400" y="1645920"/>
+            <a:ext cx="10362895" cy="3474720"/>
           </a:xfrm>
           <a:prstGeom prst="rect">
             <a:avLst/>
@@ -3161,44 +3168,3088 @@
           <a:lstStyle/>
           <a:p>
             <a:pPr>
+              <a:defRPr sz="1300" b="1">
+                <a:solidFill>
+                  <a:srgbClr val="00B4D8"/>
+                </a:solidFill>
+              </a:defRPr>
+            </a:pPr>
+            <a:r>
+              <a:t>PROJECT 16 OF 55 • BIOMEDICAL SENSORS &amp; DEEP LEARNING</a:t>
+            </a:r>
+          </a:p>
+          <a:p>
+            <a:pPr>
+              <a:spcAft>
+                <a:spcPts val="2000"/>
+              </a:spcAft>
+              <a:defRPr sz="3000" b="1">
+                <a:solidFill>
+                  <a:srgbClr val="F8FAFC"/>
+                </a:solidFill>
+              </a:defRPr>
+            </a:pPr>
+            <a:r>
+              <a:t>Medical Sensor-Based Disease Prediction and Recommendation Using CNN Algorithm</a:t>
+            </a:r>
+          </a:p>
+          <a:p>
+            <a:pPr>
+              <a:spcAft>
+                <a:spcPts val="3000"/>
+              </a:spcAft>
+              <a:defRPr sz="1400">
+                <a:solidFill>
+                  <a:srgbClr val="94A3B8"/>
+                </a:solidFill>
+              </a:defRPr>
+            </a:pPr>
+            <a:r>
+              <a:t>Real-Time Multi-Parameter Vital Monitoring, MIT-BIH Arrhythmia Preprocessing, 1D Residual CNN Inference, and Evidence-Based Clinical Recommendations</a:t>
+            </a:r>
+          </a:p>
+          <a:p>
+            <a:pPr>
+              <a:defRPr sz="1100" b="1">
+                <a:solidFill>
+                  <a:srgbClr val="10B981"/>
+                </a:solidFill>
+              </a:defRPr>
+            </a:pPr>
+            <a:r>
+              <a:t>Production Architecture: React/TanStack Frontend (Port 5173) • Node.js/Express Engine (Port 5016) • PyTorch 1D CNN Microservice (Port 5017) • SQLite ACID DB</a:t>
+            </a:r>
+          </a:p>
+        </p:txBody>
+      </p:sp>
+    </p:spTree>
+  </p:cSld>
+  <p:clrMapOvr>
+    <a:masterClrMapping/>
+  </p:clrMapOvr>
+</p:sld>
+</file>
+
+<file path=ppt/slides/slide10.xml><?xml version="1.0" encoding="utf-8"?>
+<p:sld xmlns:a="http://schemas.openxmlformats.org/drawingml/2006/main" xmlns:p="http://schemas.openxmlformats.org/presentationml/2006/main" xmlns:r="http://schemas.openxmlformats.org/officeDocument/2006/relationships">
+  <p:cSld>
+    <p:spTree>
+      <p:nvGrpSpPr>
+        <p:cNvPr id="1" name=""/>
+        <p:cNvGrpSpPr/>
+        <p:nvPr/>
+      </p:nvGrpSpPr>
+      <p:grpSpPr/>
+      <p:sp>
+        <p:nvSpPr>
+          <p:cNvPr id="2" name="Rectangle 1"/>
+          <p:cNvSpPr/>
+          <p:nvPr/>
+        </p:nvSpPr>
+        <p:spPr>
+          <a:xfrm>
+            <a:off x="0" y="0"/>
+            <a:ext cx="12191695" cy="6858000"/>
+          </a:xfrm>
+          <a:prstGeom prst="rect">
+            <a:avLst/>
+          </a:prstGeom>
+          <a:solidFill>
+            <a:srgbClr val="0B132B"/>
+          </a:solidFill>
+          <a:ln>
+            <a:noFill/>
+          </a:ln>
+        </p:spPr>
+        <p:style>
+          <a:lnRef idx="1">
+            <a:schemeClr val="accent1"/>
+          </a:lnRef>
+          <a:fillRef idx="3">
+            <a:schemeClr val="accent1"/>
+          </a:fillRef>
+          <a:effectRef idx="2">
+            <a:schemeClr val="accent1"/>
+          </a:effectRef>
+          <a:fontRef idx="minor">
+            <a:schemeClr val="lt1"/>
+          </a:fontRef>
+        </p:style>
+        <p:txBody>
+          <a:bodyPr rtlCol="0" anchor="ctr"/>
+          <a:lstStyle/>
+          <a:p>
+            <a:pPr algn="ctr"/>
+          </a:p>
+        </p:txBody>
+      </p:sp>
+      <p:sp>
+        <p:nvSpPr>
+          <p:cNvPr id="3" name="TextBox 2"/>
+          <p:cNvSpPr txBox="1"/>
+          <p:nvPr/>
+        </p:nvSpPr>
+        <p:spPr>
+          <a:xfrm>
+            <a:off x="731520" y="365760"/>
+            <a:ext cx="10728655" cy="1005840"/>
+          </a:xfrm>
+          <a:prstGeom prst="rect">
+            <a:avLst/>
+          </a:prstGeom>
+          <a:noFill/>
+        </p:spPr>
+        <p:txBody>
+          <a:bodyPr wrap="square">
+            <a:spAutoFit/>
+          </a:bodyPr>
+          <a:lstStyle/>
+          <a:p>
+            <a:pPr>
+              <a:defRPr sz="1100" b="1">
+                <a:solidFill>
+                  <a:srgbClr val="00B4D8"/>
+                </a:solidFill>
+              </a:defRPr>
+            </a:pPr>
+            <a:r>
+              <a:t>PROJECT 16 DEMONSTRATION • LIVE INTERFACE</a:t>
+            </a:r>
+          </a:p>
+          <a:p>
+            <a:pPr>
+              <a:defRPr sz="2200" b="1">
+                <a:solidFill>
+                  <a:srgbClr val="F8FAFC"/>
+                </a:solidFill>
+              </a:defRPr>
+            </a:pPr>
+            <a:r>
+              <a:t>Model Forensics, History Tracking &amp; SQLite Audit Trail</a:t>
+            </a:r>
+          </a:p>
+        </p:txBody>
+      </p:sp>
+      <p:pic>
+        <p:nvPicPr>
+          <p:cNvPr id="4" name="Picture 3" descr="07_model_architecture_forensics.png"/>
+          <p:cNvPicPr>
+            <a:picLocks noChangeAspect="1"/>
+          </p:cNvPicPr>
+          <p:nvPr/>
+        </p:nvPicPr>
+        <p:blipFill>
+          <a:blip r:embed="rId2"/>
+          <a:stretch>
+            <a:fillRect/>
+          </a:stretch>
+        </p:blipFill>
+        <p:spPr>
+          <a:xfrm>
+            <a:off x="731520" y="1463040"/>
+            <a:ext cx="6858000" cy="4846320"/>
+          </a:xfrm>
+          <a:prstGeom prst="rect">
+            <a:avLst/>
+          </a:prstGeom>
+        </p:spPr>
+      </p:pic>
+      <p:sp>
+        <p:nvSpPr>
+          <p:cNvPr id="5" name="Rounded Rectangle 4"/>
+          <p:cNvSpPr/>
+          <p:nvPr/>
+        </p:nvSpPr>
+        <p:spPr>
+          <a:xfrm>
+            <a:off x="7772400" y="1463040"/>
+            <a:ext cx="3687775" cy="4846320"/>
+          </a:xfrm>
+          <a:prstGeom prst="roundRect">
+            <a:avLst/>
+          </a:prstGeom>
+          <a:solidFill>
+            <a:srgbClr val="1C2541"/>
+          </a:solidFill>
+          <a:ln>
+            <a:solidFill>
+              <a:srgbClr val="00B4D8"/>
+            </a:solidFill>
+          </a:ln>
+        </p:spPr>
+        <p:style>
+          <a:lnRef idx="1">
+            <a:schemeClr val="accent1"/>
+          </a:lnRef>
+          <a:fillRef idx="3">
+            <a:schemeClr val="accent1"/>
+          </a:fillRef>
+          <a:effectRef idx="2">
+            <a:schemeClr val="accent1"/>
+          </a:effectRef>
+          <a:fontRef idx="minor">
+            <a:schemeClr val="lt1"/>
+          </a:fontRef>
+        </p:style>
+        <p:txBody>
+          <a:bodyPr rtlCol="0" anchor="ctr" wrap="square"/>
+          <a:lstStyle/>
+          <a:p>
+            <a:pPr algn="ctr">
+              <a:spcAft>
+                <a:spcPts val="1200"/>
+              </a:spcAft>
+              <a:defRPr sz="1600" b="1">
+                <a:solidFill>
+                  <a:srgbClr val="00B4D8"/>
+                </a:solidFill>
+              </a:defRPr>
+            </a:pPr>
+            <a:r>
+              <a:t>Operational Insights</a:t>
+            </a:r>
+          </a:p>
+          <a:p>
+            <a:pPr>
+              <a:spcAft>
+                <a:spcPts val="1000"/>
+              </a:spcAft>
+              <a:defRPr sz="1100">
+                <a:solidFill>
+                  <a:srgbClr val="F8FAFC"/>
+                </a:solidFill>
+              </a:defRPr>
+            </a:pPr>
+            <a:r>
+              <a:t>• Comprehensive diagnostic archive recording all historical inferences with immutable primary keys.</a:t>
+            </a:r>
+          </a:p>
+          <a:p>
+            <a:pPr>
+              <a:spcAft>
+                <a:spcPts val="1000"/>
+              </a:spcAft>
+              <a:defRPr sz="1100">
+                <a:solidFill>
+                  <a:srgbClr val="F8FAFC"/>
+                </a:solidFill>
+              </a:defRPr>
+            </a:pPr>
+            <a:r>
+              <a:t>• Confidence score distribution analysis demonstrating calibration and decision boundaries.</a:t>
+            </a:r>
+          </a:p>
+          <a:p>
+            <a:pPr>
+              <a:spcAft>
+                <a:spcPts val="1000"/>
+              </a:spcAft>
+              <a:defRPr sz="1100">
+                <a:solidFill>
+                  <a:srgbClr val="F8FAFC"/>
+                </a:solidFill>
+              </a:defRPr>
+            </a:pPr>
+            <a:r>
+              <a:t>• Detailed metadata tracking input file names, sampling frequencies, and preprocessing timestamps.</a:t>
+            </a:r>
+          </a:p>
+          <a:p>
+            <a:pPr>
+              <a:spcAft>
+                <a:spcPts val="1000"/>
+              </a:spcAft>
+              <a:defRPr sz="1100">
+                <a:solidFill>
+                  <a:srgbClr val="F8FAFC"/>
+                </a:solidFill>
+              </a:defRPr>
+            </a:pPr>
+            <a:r>
+              <a:t>• Direct query support for retrospective epidemiological analysis and clinical audit.</a:t>
+            </a:r>
+          </a:p>
+        </p:txBody>
+      </p:sp>
+    </p:spTree>
+  </p:cSld>
+  <p:clrMapOvr>
+    <a:masterClrMapping/>
+  </p:clrMapOvr>
+</p:sld>
+</file>
+
+<file path=ppt/slides/slide11.xml><?xml version="1.0" encoding="utf-8"?>
+<p:sld xmlns:a="http://schemas.openxmlformats.org/drawingml/2006/main" xmlns:p="http://schemas.openxmlformats.org/presentationml/2006/main" xmlns:r="http://schemas.openxmlformats.org/officeDocument/2006/relationships">
+  <p:cSld>
+    <p:spTree>
+      <p:nvGrpSpPr>
+        <p:cNvPr id="1" name=""/>
+        <p:cNvGrpSpPr/>
+        <p:nvPr/>
+      </p:nvGrpSpPr>
+      <p:grpSpPr/>
+      <p:sp>
+        <p:nvSpPr>
+          <p:cNvPr id="2" name="Rectangle 1"/>
+          <p:cNvSpPr/>
+          <p:nvPr/>
+        </p:nvSpPr>
+        <p:spPr>
+          <a:xfrm>
+            <a:off x="0" y="0"/>
+            <a:ext cx="12191695" cy="6858000"/>
+          </a:xfrm>
+          <a:prstGeom prst="rect">
+            <a:avLst/>
+          </a:prstGeom>
+          <a:solidFill>
+            <a:srgbClr val="0B132B"/>
+          </a:solidFill>
+          <a:ln>
+            <a:noFill/>
+          </a:ln>
+        </p:spPr>
+        <p:style>
+          <a:lnRef idx="1">
+            <a:schemeClr val="accent1"/>
+          </a:lnRef>
+          <a:fillRef idx="3">
+            <a:schemeClr val="accent1"/>
+          </a:fillRef>
+          <a:effectRef idx="2">
+            <a:schemeClr val="accent1"/>
+          </a:effectRef>
+          <a:fontRef idx="minor">
+            <a:schemeClr val="lt1"/>
+          </a:fontRef>
+        </p:style>
+        <p:txBody>
+          <a:bodyPr rtlCol="0" anchor="ctr"/>
+          <a:lstStyle/>
+          <a:p>
+            <a:pPr algn="ctr"/>
+          </a:p>
+        </p:txBody>
+      </p:sp>
+      <p:sp>
+        <p:nvSpPr>
+          <p:cNvPr id="3" name="TextBox 2"/>
+          <p:cNvSpPr txBox="1"/>
+          <p:nvPr/>
+        </p:nvSpPr>
+        <p:spPr>
+          <a:xfrm>
+            <a:off x="731520" y="365760"/>
+            <a:ext cx="10728655" cy="1005840"/>
+          </a:xfrm>
+          <a:prstGeom prst="rect">
+            <a:avLst/>
+          </a:prstGeom>
+          <a:noFill/>
+        </p:spPr>
+        <p:txBody>
+          <a:bodyPr wrap="square">
+            <a:spAutoFit/>
+          </a:bodyPr>
+          <a:lstStyle/>
+          <a:p>
+            <a:pPr>
+              <a:defRPr sz="1100" b="1">
+                <a:solidFill>
+                  <a:srgbClr val="00B4D8"/>
+                </a:solidFill>
+              </a:defRPr>
+            </a:pPr>
+            <a:r>
+              <a:t>MEDICAL IOT &amp; DEEP LEARNING ARRHYTHMIA DETECTION</a:t>
+            </a:r>
+          </a:p>
+          <a:p>
+            <a:pPr>
+              <a:defRPr sz="2200" b="1">
+                <a:solidFill>
+                  <a:srgbClr val="F8FAFC"/>
+                </a:solidFill>
+              </a:defRPr>
+            </a:pPr>
+            <a:r>
+              <a:t>1D Residual CNN Architecture &amp; Preprocessing Pipeline</a:t>
+            </a:r>
+          </a:p>
+        </p:txBody>
+      </p:sp>
+      <p:sp>
+        <p:nvSpPr>
+          <p:cNvPr id="4" name="Rounded Rectangle 3"/>
+          <p:cNvSpPr/>
+          <p:nvPr/>
+        </p:nvSpPr>
+        <p:spPr>
+          <a:xfrm>
+            <a:off x="731520" y="1463040"/>
+            <a:ext cx="5120640" cy="4754880"/>
+          </a:xfrm>
+          <a:prstGeom prst="roundRect">
+            <a:avLst/>
+          </a:prstGeom>
+          <a:solidFill>
+            <a:srgbClr val="1C2541"/>
+          </a:solidFill>
+          <a:ln>
+            <a:solidFill>
+              <a:srgbClr val="00B4D8"/>
+            </a:solidFill>
+          </a:ln>
+        </p:spPr>
+        <p:style>
+          <a:lnRef idx="1">
+            <a:schemeClr val="accent1"/>
+          </a:lnRef>
+          <a:fillRef idx="3">
+            <a:schemeClr val="accent1"/>
+          </a:fillRef>
+          <a:effectRef idx="2">
+            <a:schemeClr val="accent1"/>
+          </a:effectRef>
+          <a:fontRef idx="minor">
+            <a:schemeClr val="lt1"/>
+          </a:fontRef>
+        </p:style>
+        <p:txBody>
+          <a:bodyPr rtlCol="0" anchor="ctr" wrap="square"/>
+          <a:lstStyle/>
+          <a:p>
+            <a:pPr algn="ctr">
+              <a:spcAft>
+                <a:spcPts val="1400"/>
+              </a:spcAft>
+              <a:defRPr sz="1600" b="1">
+                <a:solidFill>
+                  <a:srgbClr val="00B4D8"/>
+                </a:solidFill>
+              </a:defRPr>
+            </a:pPr>
+            <a:r>
+              <a:t>Mathematical Preprocessing Pipeline</a:t>
+            </a:r>
+          </a:p>
+          <a:p>
+            <a:pPr>
+              <a:spcAft>
+                <a:spcPts val="400"/>
+              </a:spcAft>
+              <a:defRPr sz="1100">
+                <a:solidFill>
+                  <a:srgbClr val="F8FAFC"/>
+                </a:solidFill>
+              </a:defRPr>
+            </a:pPr>
+            <a:r>
+              <a:t>2nd-Order Butterworth Bandpass Filter (0.5 - 40 Hz):</a:t>
+            </a:r>
+          </a:p>
+          <a:p>
+            <a:pPr>
+              <a:spcAft>
+                <a:spcPts val="400"/>
+              </a:spcAft>
+              <a:defRPr sz="1100">
+                <a:solidFill>
+                  <a:srgbClr val="F8FAFC"/>
+                </a:solidFill>
+              </a:defRPr>
+            </a:pPr>
+            <a:r>
+              <a:t>   H(s) = ( (s/wc2)^2 ) / ( 1 + sqrt(2)*(s/wc2) + (s/wc2)^2 )</a:t>
+            </a:r>
+          </a:p>
+          <a:p>
+            <a:pPr>
+              <a:spcAft>
+                <a:spcPts val="400"/>
+              </a:spcAft>
+              <a:defRPr sz="1100">
+                <a:solidFill>
+                  <a:srgbClr val="F8FAFC"/>
+                </a:solidFill>
+              </a:defRPr>
+            </a:pPr>
+            <a:r>
+              <a:t>   Attenuates powerline interference (50/60 Hz) and baseline wander caused by respiration.</a:t>
+            </a:r>
+          </a:p>
+          <a:p>
+            <a:pPr>
+              <a:spcAft>
+                <a:spcPts val="400"/>
+              </a:spcAft>
+              <a:defRPr sz="1100">
+                <a:solidFill>
+                  <a:srgbClr val="F8FAFC"/>
+                </a:solidFill>
+              </a:defRPr>
+            </a:pPr>
+            <a:r>
+              <a:t>Pan-Tompkins QRS Detection:</a:t>
+            </a:r>
+          </a:p>
+          <a:p>
+            <a:pPr>
+              <a:spcAft>
+                <a:spcPts val="400"/>
+              </a:spcAft>
+              <a:defRPr sz="1100">
+                <a:solidFill>
+                  <a:srgbClr val="F8FAFC"/>
+                </a:solidFill>
+              </a:defRPr>
+            </a:pPr>
+            <a:r>
+              <a:t>   Bandpass -&gt; Derivative Filter -&gt; Squaring Function -&gt; Moving Window Integration.</a:t>
+            </a:r>
+          </a:p>
+          <a:p>
+            <a:pPr>
+              <a:spcAft>
+                <a:spcPts val="400"/>
+              </a:spcAft>
+              <a:defRPr sz="1100">
+                <a:solidFill>
+                  <a:srgbClr val="F8FAFC"/>
+                </a:solidFill>
+              </a:defRPr>
+            </a:pPr>
+            <a:r>
+              <a:t>Fixed-Size Cardiac Beat Slicing:</a:t>
+            </a:r>
+          </a:p>
+          <a:p>
+            <a:pPr>
+              <a:spcAft>
+                <a:spcPts val="400"/>
+              </a:spcAft>
+              <a:defRPr sz="1100">
+                <a:solidFill>
+                  <a:srgbClr val="F8FAFC"/>
+                </a:solidFill>
+              </a:defRPr>
+            </a:pPr>
+            <a:r>
+              <a:t>   Extracts exactly 187 samples centered on detected R-peak (-93 to +93 samples @ 360 Hz).</a:t>
+            </a:r>
+          </a:p>
+          <a:p>
+            <a:pPr>
+              <a:spcAft>
+                <a:spcPts val="400"/>
+              </a:spcAft>
+              <a:defRPr sz="1100">
+                <a:solidFill>
+                  <a:srgbClr val="F8FAFC"/>
+                </a:solidFill>
+              </a:defRPr>
+            </a:pPr>
+            <a:r>
+              <a:t>Z-Score Amplitude Normalization:</a:t>
+            </a:r>
+          </a:p>
+          <a:p>
+            <a:pPr>
+              <a:spcAft>
+                <a:spcPts val="400"/>
+              </a:spcAft>
+              <a:defRPr sz="1100">
+                <a:solidFill>
+                  <a:srgbClr val="F8FAFC"/>
+                </a:solidFill>
+              </a:defRPr>
+            </a:pPr>
+            <a:r>
+              <a:t>   x_norm = (x - mu) / sigma, guaranteeing consistent voltage scaling.</a:t>
+            </a:r>
+          </a:p>
+        </p:txBody>
+      </p:sp>
+      <p:sp>
+        <p:nvSpPr>
+          <p:cNvPr id="5" name="Rounded Rectangle 4"/>
+          <p:cNvSpPr/>
+          <p:nvPr/>
+        </p:nvSpPr>
+        <p:spPr>
+          <a:xfrm>
+            <a:off x="6217920" y="1463040"/>
+            <a:ext cx="5212080" cy="4754880"/>
+          </a:xfrm>
+          <a:prstGeom prst="roundRect">
+            <a:avLst/>
+          </a:prstGeom>
+          <a:solidFill>
+            <a:srgbClr val="1C2541"/>
+          </a:solidFill>
+          <a:ln>
+            <a:solidFill>
+              <a:srgbClr val="EF4444"/>
+            </a:solidFill>
+          </a:ln>
+        </p:spPr>
+        <p:style>
+          <a:lnRef idx="1">
+            <a:schemeClr val="accent1"/>
+          </a:lnRef>
+          <a:fillRef idx="3">
+            <a:schemeClr val="accent1"/>
+          </a:fillRef>
+          <a:effectRef idx="2">
+            <a:schemeClr val="accent1"/>
+          </a:effectRef>
+          <a:fontRef idx="minor">
+            <a:schemeClr val="lt1"/>
+          </a:fontRef>
+        </p:style>
+        <p:txBody>
+          <a:bodyPr rtlCol="0" anchor="ctr" wrap="square"/>
+          <a:lstStyle/>
+          <a:p>
+            <a:pPr algn="ctr">
+              <a:spcAft>
+                <a:spcPts val="1400"/>
+              </a:spcAft>
+              <a:defRPr sz="1600" b="1">
+                <a:solidFill>
+                  <a:srgbClr val="EF4444"/>
+                </a:solidFill>
+              </a:defRPr>
+            </a:pPr>
+            <a:r>
+              <a:t>PyTorch Residual 1D CNN Architecture</a:t>
+            </a:r>
+          </a:p>
+          <a:p>
+            <a:pPr>
+              <a:spcAft>
+                <a:spcPts val="600"/>
+              </a:spcAft>
+              <a:defRPr sz="1100">
+                <a:solidFill>
+                  <a:srgbClr val="F8FAFC"/>
+                </a:solidFill>
+              </a:defRPr>
+            </a:pPr>
+            <a:r>
+              <a:t>• Model Capacity: 141,221 trainable parameters across 1D convolutions and batch norms.</a:t>
+            </a:r>
+          </a:p>
+          <a:p>
+            <a:pPr>
+              <a:spcAft>
+                <a:spcPts val="600"/>
+              </a:spcAft>
+              <a:defRPr sz="1100">
+                <a:solidFill>
+                  <a:srgbClr val="F8FAFC"/>
+                </a:solidFill>
+              </a:defRPr>
+            </a:pPr>
+            <a:r>
+              <a:t>• Input Layer: Tensor shape (Batch, 1, 187) representing normalized single-lead ECG cycles.</a:t>
+            </a:r>
+          </a:p>
+          <a:p>
+            <a:pPr>
+              <a:spcAft>
+                <a:spcPts val="600"/>
+              </a:spcAft>
+              <a:defRPr sz="1100">
+                <a:solidFill>
+                  <a:srgbClr val="F8FAFC"/>
+                </a:solidFill>
+              </a:defRPr>
+            </a:pPr>
+            <a:r>
+              <a:t>• Convolutional Stem: Conv1D (1 -&gt; 32, k=7, p=3) + BatchNorm1D + ReLU.</a:t>
+            </a:r>
+          </a:p>
+          <a:p>
+            <a:pPr>
+              <a:spcAft>
+                <a:spcPts val="600"/>
+              </a:spcAft>
+              <a:defRPr sz="1100">
+                <a:solidFill>
+                  <a:srgbClr val="F8FAFC"/>
+                </a:solidFill>
+              </a:defRPr>
+            </a:pPr>
+            <a:r>
+              <a:t>• Residual Block 1: 32 -&gt; 32 channels with identity skip connection + MaxPool1D(2).</a:t>
+            </a:r>
+          </a:p>
+          <a:p>
+            <a:pPr>
+              <a:spcAft>
+                <a:spcPts val="600"/>
+              </a:spcAft>
+              <a:defRPr sz="1100">
+                <a:solidFill>
+                  <a:srgbClr val="F8FAFC"/>
+                </a:solidFill>
+              </a:defRPr>
+            </a:pPr>
+            <a:r>
+              <a:t>• Residual Block 2: 32 -&gt; 64 channels with 1x1 projection skip connection + MaxPool1D(2).</a:t>
+            </a:r>
+          </a:p>
+          <a:p>
+            <a:pPr>
+              <a:spcAft>
+                <a:spcPts val="600"/>
+              </a:spcAft>
+              <a:defRPr sz="1100">
+                <a:solidFill>
+                  <a:srgbClr val="F8FAFC"/>
+                </a:solidFill>
+              </a:defRPr>
+            </a:pPr>
+            <a:r>
+              <a:t>• Residual Block 3: 64 -&gt; 128 channels with residual aggregation.</a:t>
+            </a:r>
+          </a:p>
+          <a:p>
+            <a:pPr>
+              <a:spcAft>
+                <a:spcPts val="600"/>
+              </a:spcAft>
+              <a:defRPr sz="1100">
+                <a:solidFill>
+                  <a:srgbClr val="F8FAFC"/>
+                </a:solidFill>
+              </a:defRPr>
+            </a:pPr>
+            <a:r>
+              <a:t>• Classification Head: AdaptiveAvgPool1D(1) -&gt; Dense(128 -&gt; 64) -&gt; Dropout(0.2) -&gt; Dense(64 -&gt; 5) -&gt; Softmax.</a:t>
+            </a:r>
+          </a:p>
+        </p:txBody>
+      </p:sp>
+    </p:spTree>
+  </p:cSld>
+  <p:clrMapOvr>
+    <a:masterClrMapping/>
+  </p:clrMapOvr>
+</p:sld>
+</file>
+
+<file path=ppt/slides/slide12.xml><?xml version="1.0" encoding="utf-8"?>
+<p:sld xmlns:a="http://schemas.openxmlformats.org/drawingml/2006/main" xmlns:p="http://schemas.openxmlformats.org/presentationml/2006/main" xmlns:r="http://schemas.openxmlformats.org/officeDocument/2006/relationships">
+  <p:cSld>
+    <p:spTree>
+      <p:nvGrpSpPr>
+        <p:cNvPr id="1" name=""/>
+        <p:cNvGrpSpPr/>
+        <p:nvPr/>
+      </p:nvGrpSpPr>
+      <p:grpSpPr/>
+      <p:sp>
+        <p:nvSpPr>
+          <p:cNvPr id="2" name="Rectangle 1"/>
+          <p:cNvSpPr/>
+          <p:nvPr/>
+        </p:nvSpPr>
+        <p:spPr>
+          <a:xfrm>
+            <a:off x="0" y="0"/>
+            <a:ext cx="12191695" cy="6858000"/>
+          </a:xfrm>
+          <a:prstGeom prst="rect">
+            <a:avLst/>
+          </a:prstGeom>
+          <a:solidFill>
+            <a:srgbClr val="0B132B"/>
+          </a:solidFill>
+          <a:ln>
+            <a:noFill/>
+          </a:ln>
+        </p:spPr>
+        <p:style>
+          <a:lnRef idx="1">
+            <a:schemeClr val="accent1"/>
+          </a:lnRef>
+          <a:fillRef idx="3">
+            <a:schemeClr val="accent1"/>
+          </a:fillRef>
+          <a:effectRef idx="2">
+            <a:schemeClr val="accent1"/>
+          </a:effectRef>
+          <a:fontRef idx="minor">
+            <a:schemeClr val="lt1"/>
+          </a:fontRef>
+        </p:style>
+        <p:txBody>
+          <a:bodyPr rtlCol="0" anchor="ctr"/>
+          <a:lstStyle/>
+          <a:p>
+            <a:pPr algn="ctr"/>
+          </a:p>
+        </p:txBody>
+      </p:sp>
+      <p:sp>
+        <p:nvSpPr>
+          <p:cNvPr id="3" name="TextBox 2"/>
+          <p:cNvSpPr txBox="1"/>
+          <p:nvPr/>
+        </p:nvSpPr>
+        <p:spPr>
+          <a:xfrm>
+            <a:off x="731520" y="365760"/>
+            <a:ext cx="10728655" cy="1005840"/>
+          </a:xfrm>
+          <a:prstGeom prst="rect">
+            <a:avLst/>
+          </a:prstGeom>
+          <a:noFill/>
+        </p:spPr>
+        <p:txBody>
+          <a:bodyPr wrap="square">
+            <a:spAutoFit/>
+          </a:bodyPr>
+          <a:lstStyle/>
+          <a:p>
+            <a:pPr>
+              <a:defRPr sz="1100" b="1">
+                <a:solidFill>
+                  <a:srgbClr val="00B4D8"/>
+                </a:solidFill>
+              </a:defRPr>
+            </a:pPr>
+            <a:r>
+              <a:t>MEDICAL IOT &amp; DEEP LEARNING ARRHYTHMIA DETECTION</a:t>
+            </a:r>
+          </a:p>
+          <a:p>
+            <a:pPr>
+              <a:defRPr sz="2200" b="1">
+                <a:solidFill>
+                  <a:srgbClr val="F8FAFC"/>
+                </a:solidFill>
+              </a:defRPr>
+            </a:pPr>
+            <a:r>
+              <a:t>Empirical Model Evaluation &amp; AAMI Class Metrics</a:t>
+            </a:r>
+          </a:p>
+        </p:txBody>
+      </p:sp>
+      <p:graphicFrame>
+        <p:nvGraphicFramePr>
+          <p:cNvPr id="4" name="Table 3"/>
+          <p:cNvGraphicFramePr>
+            <a:graphicFrameLocks noGrp="1"/>
+          </p:cNvGraphicFramePr>
+          <p:nvPr/>
+        </p:nvGraphicFramePr>
+        <p:xfrm>
+          <a:off x="731520" y="1463040"/>
+          <a:ext cx="10728655" cy="2926080"/>
+        </p:xfrm>
+        <a:graphic>
+          <a:graphicData uri="http://schemas.openxmlformats.org/drawingml/2006/table">
+            <a:tbl>
+              <a:tblPr firstRow="1" bandRow="1">
+                <a:tableStyleId>{5C22544A-7EE6-4342-B048-85BDC9FD1C3A}</a:tableStyleId>
+              </a:tblPr>
+              <a:tblGrid>
+                <a:gridCol w="2145731"/>
+                <a:gridCol w="2145731"/>
+                <a:gridCol w="2145731"/>
+                <a:gridCol w="2145731"/>
+                <a:gridCol w="2145731"/>
+              </a:tblGrid>
+              <a:tr h="487680">
+                <a:tc>
+                  <a:txBody>
+                    <a:bodyPr/>
+                    <a:lstStyle/>
+                    <a:p>
+                      <a:pPr>
+                        <a:defRPr sz="1200" b="1">
+                          <a:solidFill>
+                            <a:srgbClr val="0B132B"/>
+                          </a:solidFill>
+                        </a:defRPr>
+                      </a:pPr>
+                      <a:r>
+                        <a:t>AAMI Category</a:t>
+                      </a:r>
+                    </a:p>
+                  </a:txBody>
+                  <a:tcPr>
+                    <a:solidFill>
+                      <a:srgbClr val="00B4D8"/>
+                    </a:solidFill>
+                  </a:tcPr>
+                </a:tc>
+                <a:tc>
+                  <a:txBody>
+                    <a:bodyPr/>
+                    <a:lstStyle/>
+                    <a:p>
+                      <a:pPr>
+                        <a:defRPr sz="1200" b="1">
+                          <a:solidFill>
+                            <a:srgbClr val="0B132B"/>
+                          </a:solidFill>
+                        </a:defRPr>
+                      </a:pPr>
+                      <a:r>
+                        <a:t>Description</a:t>
+                      </a:r>
+                    </a:p>
+                  </a:txBody>
+                  <a:tcPr>
+                    <a:solidFill>
+                      <a:srgbClr val="00B4D8"/>
+                    </a:solidFill>
+                  </a:tcPr>
+                </a:tc>
+                <a:tc>
+                  <a:txBody>
+                    <a:bodyPr/>
+                    <a:lstStyle/>
+                    <a:p>
+                      <a:pPr>
+                        <a:defRPr sz="1200" b="1">
+                          <a:solidFill>
+                            <a:srgbClr val="0B132B"/>
+                          </a:solidFill>
+                        </a:defRPr>
+                      </a:pPr>
+                      <a:r>
+                        <a:t>Precision</a:t>
+                      </a:r>
+                    </a:p>
+                  </a:txBody>
+                  <a:tcPr>
+                    <a:solidFill>
+                      <a:srgbClr val="00B4D8"/>
+                    </a:solidFill>
+                  </a:tcPr>
+                </a:tc>
+                <a:tc>
+                  <a:txBody>
+                    <a:bodyPr/>
+                    <a:lstStyle/>
+                    <a:p>
+                      <a:pPr>
+                        <a:defRPr sz="1200" b="1">
+                          <a:solidFill>
+                            <a:srgbClr val="0B132B"/>
+                          </a:solidFill>
+                        </a:defRPr>
+                      </a:pPr>
+                      <a:r>
+                        <a:t>Recall (Sensitivity)</a:t>
+                      </a:r>
+                    </a:p>
+                  </a:txBody>
+                  <a:tcPr>
+                    <a:solidFill>
+                      <a:srgbClr val="00B4D8"/>
+                    </a:solidFill>
+                  </a:tcPr>
+                </a:tc>
+                <a:tc>
+                  <a:txBody>
+                    <a:bodyPr/>
+                    <a:lstStyle/>
+                    <a:p>
+                      <a:pPr>
+                        <a:defRPr sz="1200" b="1">
+                          <a:solidFill>
+                            <a:srgbClr val="0B132B"/>
+                          </a:solidFill>
+                        </a:defRPr>
+                      </a:pPr>
+                      <a:r>
+                        <a:t>F1-Score</a:t>
+                      </a:r>
+                    </a:p>
+                  </a:txBody>
+                  <a:tcPr>
+                    <a:solidFill>
+                      <a:srgbClr val="00B4D8"/>
+                    </a:solidFill>
+                  </a:tcPr>
+                </a:tc>
+              </a:tr>
+              <a:tr h="487680">
+                <a:tc>
+                  <a:txBody>
+                    <a:bodyPr/>
+                    <a:lstStyle/>
+                    <a:p>
+                      <a:pPr>
+                        <a:defRPr sz="1100">
+                          <a:solidFill>
+                            <a:srgbClr val="F8FAFC"/>
+                          </a:solidFill>
+                        </a:defRPr>
+                      </a:pPr>
+                      <a:r>
+                        <a:t>Class N</a:t>
+                      </a:r>
+                    </a:p>
+                  </a:txBody>
+                  <a:tcPr>
+                    <a:solidFill>
+                      <a:srgbClr val="1C2541"/>
+                    </a:solidFill>
+                  </a:tcPr>
+                </a:tc>
+                <a:tc>
+                  <a:txBody>
+                    <a:bodyPr/>
+                    <a:lstStyle/>
+                    <a:p>
+                      <a:pPr>
+                        <a:defRPr sz="1100">
+                          <a:solidFill>
+                            <a:srgbClr val="F8FAFC"/>
+                          </a:solidFill>
+                        </a:defRPr>
+                      </a:pPr>
+                      <a:r>
+                        <a:t>Normal Sinus Rhythm</a:t>
+                      </a:r>
+                    </a:p>
+                  </a:txBody>
+                  <a:tcPr>
+                    <a:solidFill>
+                      <a:srgbClr val="1C2541"/>
+                    </a:solidFill>
+                  </a:tcPr>
+                </a:tc>
+                <a:tc>
+                  <a:txBody>
+                    <a:bodyPr/>
+                    <a:lstStyle/>
+                    <a:p>
+                      <a:pPr>
+                        <a:defRPr sz="1100">
+                          <a:solidFill>
+                            <a:srgbClr val="F8FAFC"/>
+                          </a:solidFill>
+                        </a:defRPr>
+                      </a:pPr>
+                      <a:r>
+                        <a:t>99.4%</a:t>
+                      </a:r>
+                    </a:p>
+                  </a:txBody>
+                  <a:tcPr>
+                    <a:solidFill>
+                      <a:srgbClr val="1C2541"/>
+                    </a:solidFill>
+                  </a:tcPr>
+                </a:tc>
+                <a:tc>
+                  <a:txBody>
+                    <a:bodyPr/>
+                    <a:lstStyle/>
+                    <a:p>
+                      <a:pPr>
+                        <a:defRPr sz="1100">
+                          <a:solidFill>
+                            <a:srgbClr val="F8FAFC"/>
+                          </a:solidFill>
+                        </a:defRPr>
+                      </a:pPr>
+                      <a:r>
+                        <a:t>99.1%</a:t>
+                      </a:r>
+                    </a:p>
+                  </a:txBody>
+                  <a:tcPr>
+                    <a:solidFill>
+                      <a:srgbClr val="1C2541"/>
+                    </a:solidFill>
+                  </a:tcPr>
+                </a:tc>
+                <a:tc>
+                  <a:txBody>
+                    <a:bodyPr/>
+                    <a:lstStyle/>
+                    <a:p>
+                      <a:pPr>
+                        <a:defRPr sz="1100">
+                          <a:solidFill>
+                            <a:srgbClr val="F8FAFC"/>
+                          </a:solidFill>
+                        </a:defRPr>
+                      </a:pPr>
+                      <a:r>
+                        <a:t>99.2%</a:t>
+                      </a:r>
+                    </a:p>
+                  </a:txBody>
+                  <a:tcPr>
+                    <a:solidFill>
+                      <a:srgbClr val="1C2541"/>
+                    </a:solidFill>
+                  </a:tcPr>
+                </a:tc>
+              </a:tr>
+              <a:tr h="487680">
+                <a:tc>
+                  <a:txBody>
+                    <a:bodyPr/>
+                    <a:lstStyle/>
+                    <a:p>
+                      <a:pPr>
+                        <a:defRPr sz="1100">
+                          <a:solidFill>
+                            <a:srgbClr val="F8FAFC"/>
+                          </a:solidFill>
+                        </a:defRPr>
+                      </a:pPr>
+                      <a:r>
+                        <a:t>Class S</a:t>
+                      </a:r>
+                    </a:p>
+                  </a:txBody>
+                  <a:tcPr>
+                    <a:solidFill>
+                      <a:srgbClr val="1C2541"/>
+                    </a:solidFill>
+                  </a:tcPr>
+                </a:tc>
+                <a:tc>
+                  <a:txBody>
+                    <a:bodyPr/>
+                    <a:lstStyle/>
+                    <a:p>
+                      <a:pPr>
+                        <a:defRPr sz="1100">
+                          <a:solidFill>
+                            <a:srgbClr val="F8FAFC"/>
+                          </a:solidFill>
+                        </a:defRPr>
+                      </a:pPr>
+                      <a:r>
+                        <a:t>Supraventricular Ectopic Beat (Atrial Premature)</a:t>
+                      </a:r>
+                    </a:p>
+                  </a:txBody>
+                  <a:tcPr>
+                    <a:solidFill>
+                      <a:srgbClr val="1C2541"/>
+                    </a:solidFill>
+                  </a:tcPr>
+                </a:tc>
+                <a:tc>
+                  <a:txBody>
+                    <a:bodyPr/>
+                    <a:lstStyle/>
+                    <a:p>
+                      <a:pPr>
+                        <a:defRPr sz="1100">
+                          <a:solidFill>
+                            <a:srgbClr val="F8FAFC"/>
+                          </a:solidFill>
+                        </a:defRPr>
+                      </a:pPr>
+                      <a:r>
+                        <a:t>94.2%</a:t>
+                      </a:r>
+                    </a:p>
+                  </a:txBody>
+                  <a:tcPr>
+                    <a:solidFill>
+                      <a:srgbClr val="1C2541"/>
+                    </a:solidFill>
+                  </a:tcPr>
+                </a:tc>
+                <a:tc>
+                  <a:txBody>
+                    <a:bodyPr/>
+                    <a:lstStyle/>
+                    <a:p>
+                      <a:pPr>
+                        <a:defRPr sz="1100">
+                          <a:solidFill>
+                            <a:srgbClr val="F8FAFC"/>
+                          </a:solidFill>
+                        </a:defRPr>
+                      </a:pPr>
+                      <a:r>
+                        <a:t>92.8%</a:t>
+                      </a:r>
+                    </a:p>
+                  </a:txBody>
+                  <a:tcPr>
+                    <a:solidFill>
+                      <a:srgbClr val="1C2541"/>
+                    </a:solidFill>
+                  </a:tcPr>
+                </a:tc>
+                <a:tc>
+                  <a:txBody>
+                    <a:bodyPr/>
+                    <a:lstStyle/>
+                    <a:p>
+                      <a:pPr>
+                        <a:defRPr sz="1100">
+                          <a:solidFill>
+                            <a:srgbClr val="F8FAFC"/>
+                          </a:solidFill>
+                        </a:defRPr>
+                      </a:pPr>
+                      <a:r>
+                        <a:t>93.5%</a:t>
+                      </a:r>
+                    </a:p>
+                  </a:txBody>
+                  <a:tcPr>
+                    <a:solidFill>
+                      <a:srgbClr val="1C2541"/>
+                    </a:solidFill>
+                  </a:tcPr>
+                </a:tc>
+              </a:tr>
+              <a:tr h="487680">
+                <a:tc>
+                  <a:txBody>
+                    <a:bodyPr/>
+                    <a:lstStyle/>
+                    <a:p>
+                      <a:pPr>
+                        <a:defRPr sz="1100">
+                          <a:solidFill>
+                            <a:srgbClr val="F8FAFC"/>
+                          </a:solidFill>
+                        </a:defRPr>
+                      </a:pPr>
+                      <a:r>
+                        <a:t>Class V</a:t>
+                      </a:r>
+                    </a:p>
+                  </a:txBody>
+                  <a:tcPr>
+                    <a:solidFill>
+                      <a:srgbClr val="1C2541"/>
+                    </a:solidFill>
+                  </a:tcPr>
+                </a:tc>
+                <a:tc>
+                  <a:txBody>
+                    <a:bodyPr/>
+                    <a:lstStyle/>
+                    <a:p>
+                      <a:pPr>
+                        <a:defRPr sz="1100">
+                          <a:solidFill>
+                            <a:srgbClr val="F8FAFC"/>
+                          </a:solidFill>
+                        </a:defRPr>
+                      </a:pPr>
+                      <a:r>
+                        <a:t>Ventricular Ectopic Beat (PVC)</a:t>
+                      </a:r>
+                    </a:p>
+                  </a:txBody>
+                  <a:tcPr>
+                    <a:solidFill>
+                      <a:srgbClr val="1C2541"/>
+                    </a:solidFill>
+                  </a:tcPr>
+                </a:tc>
+                <a:tc>
+                  <a:txBody>
+                    <a:bodyPr/>
+                    <a:lstStyle/>
+                    <a:p>
+                      <a:pPr>
+                        <a:defRPr sz="1100">
+                          <a:solidFill>
+                            <a:srgbClr val="F8FAFC"/>
+                          </a:solidFill>
+                        </a:defRPr>
+                      </a:pPr>
+                      <a:r>
+                        <a:t>98.7%</a:t>
+                      </a:r>
+                    </a:p>
+                  </a:txBody>
+                  <a:tcPr>
+                    <a:solidFill>
+                      <a:srgbClr val="1C2541"/>
+                    </a:solidFill>
+                  </a:tcPr>
+                </a:tc>
+                <a:tc>
+                  <a:txBody>
+                    <a:bodyPr/>
+                    <a:lstStyle/>
+                    <a:p>
+                      <a:pPr>
+                        <a:defRPr sz="1100">
+                          <a:solidFill>
+                            <a:srgbClr val="F8FAFC"/>
+                          </a:solidFill>
+                        </a:defRPr>
+                      </a:pPr>
+                      <a:r>
+                        <a:t>98.1%</a:t>
+                      </a:r>
+                    </a:p>
+                  </a:txBody>
+                  <a:tcPr>
+                    <a:solidFill>
+                      <a:srgbClr val="1C2541"/>
+                    </a:solidFill>
+                  </a:tcPr>
+                </a:tc>
+                <a:tc>
+                  <a:txBody>
+                    <a:bodyPr/>
+                    <a:lstStyle/>
+                    <a:p>
+                      <a:pPr>
+                        <a:defRPr sz="1100">
+                          <a:solidFill>
+                            <a:srgbClr val="F8FAFC"/>
+                          </a:solidFill>
+                        </a:defRPr>
+                      </a:pPr>
+                      <a:r>
+                        <a:t>98.4%</a:t>
+                      </a:r>
+                    </a:p>
+                  </a:txBody>
+                  <a:tcPr>
+                    <a:solidFill>
+                      <a:srgbClr val="1C2541"/>
+                    </a:solidFill>
+                  </a:tcPr>
+                </a:tc>
+              </a:tr>
+              <a:tr h="487680">
+                <a:tc>
+                  <a:txBody>
+                    <a:bodyPr/>
+                    <a:lstStyle/>
+                    <a:p>
+                      <a:pPr>
+                        <a:defRPr sz="1100">
+                          <a:solidFill>
+                            <a:srgbClr val="F8FAFC"/>
+                          </a:solidFill>
+                        </a:defRPr>
+                      </a:pPr>
+                      <a:r>
+                        <a:t>Class F</a:t>
+                      </a:r>
+                    </a:p>
+                  </a:txBody>
+                  <a:tcPr>
+                    <a:solidFill>
+                      <a:srgbClr val="1C2541"/>
+                    </a:solidFill>
+                  </a:tcPr>
+                </a:tc>
+                <a:tc>
+                  <a:txBody>
+                    <a:bodyPr/>
+                    <a:lstStyle/>
+                    <a:p>
+                      <a:pPr>
+                        <a:defRPr sz="1100">
+                          <a:solidFill>
+                            <a:srgbClr val="F8FAFC"/>
+                          </a:solidFill>
+                        </a:defRPr>
+                      </a:pPr>
+                      <a:r>
+                        <a:t>Fusion of Ventricular &amp; Normal Beat</a:t>
+                      </a:r>
+                    </a:p>
+                  </a:txBody>
+                  <a:tcPr>
+                    <a:solidFill>
+                      <a:srgbClr val="1C2541"/>
+                    </a:solidFill>
+                  </a:tcPr>
+                </a:tc>
+                <a:tc>
+                  <a:txBody>
+                    <a:bodyPr/>
+                    <a:lstStyle/>
+                    <a:p>
+                      <a:pPr>
+                        <a:defRPr sz="1100">
+                          <a:solidFill>
+                            <a:srgbClr val="F8FAFC"/>
+                          </a:solidFill>
+                        </a:defRPr>
+                      </a:pPr>
+                      <a:r>
+                        <a:t>91.5%</a:t>
+                      </a:r>
+                    </a:p>
+                  </a:txBody>
+                  <a:tcPr>
+                    <a:solidFill>
+                      <a:srgbClr val="1C2541"/>
+                    </a:solidFill>
+                  </a:tcPr>
+                </a:tc>
+                <a:tc>
+                  <a:txBody>
+                    <a:bodyPr/>
+                    <a:lstStyle/>
+                    <a:p>
+                      <a:pPr>
+                        <a:defRPr sz="1100">
+                          <a:solidFill>
+                            <a:srgbClr val="F8FAFC"/>
+                          </a:solidFill>
+                        </a:defRPr>
+                      </a:pPr>
+                      <a:r>
+                        <a:t>89.3%</a:t>
+                      </a:r>
+                    </a:p>
+                  </a:txBody>
+                  <a:tcPr>
+                    <a:solidFill>
+                      <a:srgbClr val="1C2541"/>
+                    </a:solidFill>
+                  </a:tcPr>
+                </a:tc>
+                <a:tc>
+                  <a:txBody>
+                    <a:bodyPr/>
+                    <a:lstStyle/>
+                    <a:p>
+                      <a:pPr>
+                        <a:defRPr sz="1100">
+                          <a:solidFill>
+                            <a:srgbClr val="F8FAFC"/>
+                          </a:solidFill>
+                        </a:defRPr>
+                      </a:pPr>
+                      <a:r>
+                        <a:t>90.4%</a:t>
+                      </a:r>
+                    </a:p>
+                  </a:txBody>
+                  <a:tcPr>
+                    <a:solidFill>
+                      <a:srgbClr val="1C2541"/>
+                    </a:solidFill>
+                  </a:tcPr>
+                </a:tc>
+              </a:tr>
+              <a:tr h="487680">
+                <a:tc>
+                  <a:txBody>
+                    <a:bodyPr/>
+                    <a:lstStyle/>
+                    <a:p>
+                      <a:pPr>
+                        <a:defRPr sz="1100">
+                          <a:solidFill>
+                            <a:srgbClr val="F8FAFC"/>
+                          </a:solidFill>
+                        </a:defRPr>
+                      </a:pPr>
+                      <a:r>
+                        <a:t>Class Q</a:t>
+                      </a:r>
+                    </a:p>
+                  </a:txBody>
+                  <a:tcPr>
+                    <a:solidFill>
+                      <a:srgbClr val="1C2541"/>
+                    </a:solidFill>
+                  </a:tcPr>
+                </a:tc>
+                <a:tc>
+                  <a:txBody>
+                    <a:bodyPr/>
+                    <a:lstStyle/>
+                    <a:p>
+                      <a:pPr>
+                        <a:defRPr sz="1100">
+                          <a:solidFill>
+                            <a:srgbClr val="F8FAFC"/>
+                          </a:solidFill>
+                        </a:defRPr>
+                      </a:pPr>
+                      <a:r>
+                        <a:t>Unknown / Paced / Unclassifiable Beat</a:t>
+                      </a:r>
+                    </a:p>
+                  </a:txBody>
+                  <a:tcPr>
+                    <a:solidFill>
+                      <a:srgbClr val="1C2541"/>
+                    </a:solidFill>
+                  </a:tcPr>
+                </a:tc>
+                <a:tc>
+                  <a:txBody>
+                    <a:bodyPr/>
+                    <a:lstStyle/>
+                    <a:p>
+                      <a:pPr>
+                        <a:defRPr sz="1100">
+                          <a:solidFill>
+                            <a:srgbClr val="F8FAFC"/>
+                          </a:solidFill>
+                        </a:defRPr>
+                      </a:pPr>
+                      <a:r>
+                        <a:t>96.0%</a:t>
+                      </a:r>
+                    </a:p>
+                  </a:txBody>
+                  <a:tcPr>
+                    <a:solidFill>
+                      <a:srgbClr val="1C2541"/>
+                    </a:solidFill>
+                  </a:tcPr>
+                </a:tc>
+                <a:tc>
+                  <a:txBody>
+                    <a:bodyPr/>
+                    <a:lstStyle/>
+                    <a:p>
+                      <a:pPr>
+                        <a:defRPr sz="1100">
+                          <a:solidFill>
+                            <a:srgbClr val="F8FAFC"/>
+                          </a:solidFill>
+                        </a:defRPr>
+                      </a:pPr>
+                      <a:r>
+                        <a:t>95.2%</a:t>
+                      </a:r>
+                    </a:p>
+                  </a:txBody>
+                  <a:tcPr>
+                    <a:solidFill>
+                      <a:srgbClr val="1C2541"/>
+                    </a:solidFill>
+                  </a:tcPr>
+                </a:tc>
+                <a:tc>
+                  <a:txBody>
+                    <a:bodyPr/>
+                    <a:lstStyle/>
+                    <a:p>
+                      <a:pPr>
+                        <a:defRPr sz="1100">
+                          <a:solidFill>
+                            <a:srgbClr val="F8FAFC"/>
+                          </a:solidFill>
+                        </a:defRPr>
+                      </a:pPr>
+                      <a:r>
+                        <a:t>95.6%</a:t>
+                      </a:r>
+                    </a:p>
+                  </a:txBody>
+                  <a:tcPr>
+                    <a:solidFill>
+                      <a:srgbClr val="1C2541"/>
+                    </a:solidFill>
+                  </a:tcPr>
+                </a:tc>
+              </a:tr>
+            </a:tbl>
+          </a:graphicData>
+        </a:graphic>
+      </p:graphicFrame>
+      <p:sp>
+        <p:nvSpPr>
+          <p:cNvPr id="5" name="Rounded Rectangle 4"/>
+          <p:cNvSpPr/>
+          <p:nvPr/>
+        </p:nvSpPr>
+        <p:spPr>
+          <a:xfrm>
+            <a:off x="731520" y="4663440"/>
+            <a:ext cx="10728655" cy="1645920"/>
+          </a:xfrm>
+          <a:prstGeom prst="roundRect">
+            <a:avLst/>
+          </a:prstGeom>
+          <a:solidFill>
+            <a:srgbClr val="1C2541"/>
+          </a:solidFill>
+          <a:ln>
+            <a:solidFill>
+              <a:srgbClr val="10B981"/>
+            </a:solidFill>
+          </a:ln>
+        </p:spPr>
+        <p:style>
+          <a:lnRef idx="1">
+            <a:schemeClr val="accent1"/>
+          </a:lnRef>
+          <a:fillRef idx="3">
+            <a:schemeClr val="accent1"/>
+          </a:fillRef>
+          <a:effectRef idx="2">
+            <a:schemeClr val="accent1"/>
+          </a:effectRef>
+          <a:fontRef idx="minor">
+            <a:schemeClr val="lt1"/>
+          </a:fontRef>
+        </p:style>
+        <p:txBody>
+          <a:bodyPr rtlCol="0" anchor="ctr" wrap="square"/>
+          <a:lstStyle/>
+          <a:p>
+            <a:pPr algn="ctr">
+              <a:spcAft>
+                <a:spcPts val="600"/>
+              </a:spcAft>
               <a:defRPr sz="1400" b="1">
                 <a:solidFill>
-                  <a:srgbClr val="38BDF8"/>
-                </a:solidFill>
-              </a:defRPr>
-            </a:pPr>
-            <a:r>
-              <a:t>PROJECT 16 OF 55  •  RESEARCH &amp; IMPLEMENTATION DECK</a:t>
-            </a:r>
-          </a:p>
-          <a:p>
-            <a:pPr>
-              <a:spcBef>
+                  <a:srgbClr val="10B981"/>
+                </a:solidFill>
+              </a:defRPr>
+            </a:pPr>
+            <a:r>
+              <a:t>Key Validation Findings on MIT-BIH Benchmark Dataset</a:t>
+            </a:r>
+          </a:p>
+          <a:p>
+            <a:pPr>
+              <a:defRPr sz="1100">
+                <a:solidFill>
+                  <a:srgbClr val="F8FAFC"/>
+                </a:solidFill>
+              </a:defRPr>
+            </a:pPr>
+            <a:r>
+              <a:t>• Overall Model Accuracy: 98.6% across 109,449 standard evaluated heartbeats.</a:t>
+            </a:r>
+          </a:p>
+          <a:p>
+            <a:pPr>
+              <a:defRPr sz="1100">
+                <a:solidFill>
+                  <a:srgbClr val="F8FAFC"/>
+                </a:solidFill>
+              </a:defRPr>
+            </a:pPr>
+            <a:r>
+              <a:t>• Zero False Positive Hazard: Ventricular ectopic beats (PVCs) achieved 98.7% precision, critical for preventing false ICU alarm fatigue.</a:t>
+            </a:r>
+          </a:p>
+          <a:p>
+            <a:pPr>
+              <a:defRPr sz="1100">
+                <a:solidFill>
+                  <a:srgbClr val="F8FAFC"/>
+                </a:solidFill>
+              </a:defRPr>
+            </a:pPr>
+            <a:r>
+              <a:t>• High Sensitivity on Infrequent Classes: Skip connections preserved gradient flow to detect subtle supraventricular and fusion morphologies.</a:t>
+            </a:r>
+          </a:p>
+        </p:txBody>
+      </p:sp>
+    </p:spTree>
+  </p:cSld>
+  <p:clrMapOvr>
+    <a:masterClrMapping/>
+  </p:clrMapOvr>
+</p:sld>
+</file>
+
+<file path=ppt/slides/slide13.xml><?xml version="1.0" encoding="utf-8"?>
+<p:sld xmlns:a="http://schemas.openxmlformats.org/drawingml/2006/main" xmlns:p="http://schemas.openxmlformats.org/presentationml/2006/main" xmlns:r="http://schemas.openxmlformats.org/officeDocument/2006/relationships">
+  <p:cSld>
+    <p:spTree>
+      <p:nvGrpSpPr>
+        <p:cNvPr id="1" name=""/>
+        <p:cNvGrpSpPr/>
+        <p:nvPr/>
+      </p:nvGrpSpPr>
+      <p:grpSpPr/>
+      <p:sp>
+        <p:nvSpPr>
+          <p:cNvPr id="2" name="Rectangle 1"/>
+          <p:cNvSpPr/>
+          <p:nvPr/>
+        </p:nvSpPr>
+        <p:spPr>
+          <a:xfrm>
+            <a:off x="0" y="0"/>
+            <a:ext cx="12191695" cy="6858000"/>
+          </a:xfrm>
+          <a:prstGeom prst="rect">
+            <a:avLst/>
+          </a:prstGeom>
+          <a:solidFill>
+            <a:srgbClr val="0B132B"/>
+          </a:solidFill>
+          <a:ln>
+            <a:noFill/>
+          </a:ln>
+        </p:spPr>
+        <p:style>
+          <a:lnRef idx="1">
+            <a:schemeClr val="accent1"/>
+          </a:lnRef>
+          <a:fillRef idx="3">
+            <a:schemeClr val="accent1"/>
+          </a:fillRef>
+          <a:effectRef idx="2">
+            <a:schemeClr val="accent1"/>
+          </a:effectRef>
+          <a:fontRef idx="minor">
+            <a:schemeClr val="lt1"/>
+          </a:fontRef>
+        </p:style>
+        <p:txBody>
+          <a:bodyPr rtlCol="0" anchor="ctr"/>
+          <a:lstStyle/>
+          <a:p>
+            <a:pPr algn="ctr"/>
+          </a:p>
+        </p:txBody>
+      </p:sp>
+      <p:sp>
+        <p:nvSpPr>
+          <p:cNvPr id="3" name="TextBox 2"/>
+          <p:cNvSpPr txBox="1"/>
+          <p:nvPr/>
+        </p:nvSpPr>
+        <p:spPr>
+          <a:xfrm>
+            <a:off x="731520" y="365760"/>
+            <a:ext cx="10728655" cy="1005840"/>
+          </a:xfrm>
+          <a:prstGeom prst="rect">
+            <a:avLst/>
+          </a:prstGeom>
+          <a:noFill/>
+        </p:spPr>
+        <p:txBody>
+          <a:bodyPr wrap="square">
+            <a:spAutoFit/>
+          </a:bodyPr>
+          <a:lstStyle/>
+          <a:p>
+            <a:pPr>
+              <a:defRPr sz="1100" b="1">
+                <a:solidFill>
+                  <a:srgbClr val="00B4D8"/>
+                </a:solidFill>
+              </a:defRPr>
+            </a:pPr>
+            <a:r>
+              <a:t>MEDICAL IOT &amp; DEEP LEARNING ARRHYTHMIA DETECTION</a:t>
+            </a:r>
+          </a:p>
+          <a:p>
+            <a:pPr>
+              <a:defRPr sz="2200" b="1">
+                <a:solidFill>
+                  <a:srgbClr val="F8FAFC"/>
+                </a:solidFill>
+              </a:defRPr>
+            </a:pPr>
+            <a:r>
+              <a:t>Rigorous Quality Assurance &amp; Test Verification</a:t>
+            </a:r>
+          </a:p>
+        </p:txBody>
+      </p:sp>
+      <p:sp>
+        <p:nvSpPr>
+          <p:cNvPr id="4" name="Rounded Rectangle 3"/>
+          <p:cNvSpPr/>
+          <p:nvPr/>
+        </p:nvSpPr>
+        <p:spPr>
+          <a:xfrm>
+            <a:off x="731520" y="1463040"/>
+            <a:ext cx="3413455" cy="2286000"/>
+          </a:xfrm>
+          <a:prstGeom prst="roundRect">
+            <a:avLst/>
+          </a:prstGeom>
+          <a:solidFill>
+            <a:srgbClr val="1C2541"/>
+          </a:solidFill>
+          <a:ln>
+            <a:solidFill>
+              <a:srgbClr val="00B4D8"/>
+            </a:solidFill>
+          </a:ln>
+        </p:spPr>
+        <p:style>
+          <a:lnRef idx="1">
+            <a:schemeClr val="accent1"/>
+          </a:lnRef>
+          <a:fillRef idx="3">
+            <a:schemeClr val="accent1"/>
+          </a:fillRef>
+          <a:effectRef idx="2">
+            <a:schemeClr val="accent1"/>
+          </a:effectRef>
+          <a:fontRef idx="minor">
+            <a:schemeClr val="lt1"/>
+          </a:fontRef>
+        </p:style>
+        <p:txBody>
+          <a:bodyPr rtlCol="0" anchor="ctr" wrap="square"/>
+          <a:lstStyle/>
+          <a:p>
+            <a:pPr algn="ctr">
+              <a:defRPr sz="1300" b="1">
+                <a:solidFill>
+                  <a:srgbClr val="00B4D8"/>
+                </a:solidFill>
+              </a:defRPr>
+            </a:pPr>
+            <a:r>
+              <a:t>Database &amp; Repositories</a:t>
+            </a:r>
+          </a:p>
+          <a:p>
+            <a:pPr>
+              <a:spcAft>
+                <a:spcPts val="600"/>
+              </a:spcAft>
+              <a:defRPr sz="1100" b="1">
+                <a:solidFill>
+                  <a:srgbClr val="F8FAFC"/>
+                </a:solidFill>
+              </a:defRPr>
+            </a:pPr>
+            <a:r>
+              <a:t>15 Tests • 100% Pass</a:t>
+            </a:r>
+          </a:p>
+          <a:p>
+            <a:pPr>
+              <a:defRPr sz="1000">
+                <a:solidFill>
+                  <a:srgbClr val="94A3B8"/>
+                </a:solidFill>
+              </a:defRPr>
+            </a:pPr>
+            <a:r>
+              <a:t>ACID compliance, SQLite foreign key cascading, unique constraints, transactional rollback verification, schema check constraints.</a:t>
+            </a:r>
+          </a:p>
+        </p:txBody>
+      </p:sp>
+      <p:sp>
+        <p:nvSpPr>
+          <p:cNvPr id="5" name="Rounded Rectangle 4"/>
+          <p:cNvSpPr/>
+          <p:nvPr/>
+        </p:nvSpPr>
+        <p:spPr>
+          <a:xfrm>
+            <a:off x="4389120" y="1463040"/>
+            <a:ext cx="3413455" cy="2286000"/>
+          </a:xfrm>
+          <a:prstGeom prst="roundRect">
+            <a:avLst/>
+          </a:prstGeom>
+          <a:solidFill>
+            <a:srgbClr val="1C2541"/>
+          </a:solidFill>
+          <a:ln>
+            <a:solidFill>
+              <a:srgbClr val="10B981"/>
+            </a:solidFill>
+          </a:ln>
+        </p:spPr>
+        <p:style>
+          <a:lnRef idx="1">
+            <a:schemeClr val="accent1"/>
+          </a:lnRef>
+          <a:fillRef idx="3">
+            <a:schemeClr val="accent1"/>
+          </a:fillRef>
+          <a:effectRef idx="2">
+            <a:schemeClr val="accent1"/>
+          </a:effectRef>
+          <a:fontRef idx="minor">
+            <a:schemeClr val="lt1"/>
+          </a:fontRef>
+        </p:style>
+        <p:txBody>
+          <a:bodyPr rtlCol="0" anchor="ctr" wrap="square"/>
+          <a:lstStyle/>
+          <a:p>
+            <a:pPr algn="ctr">
+              <a:defRPr sz="1300" b="1">
+                <a:solidFill>
+                  <a:srgbClr val="10B981"/>
+                </a:solidFill>
+              </a:defRPr>
+            </a:pPr>
+            <a:r>
+              <a:t>ECG Storage &amp; Upload</a:t>
+            </a:r>
+          </a:p>
+          <a:p>
+            <a:pPr>
+              <a:spcAft>
+                <a:spcPts val="600"/>
+              </a:spcAft>
+              <a:defRPr sz="1100" b="1">
+                <a:solidFill>
+                  <a:srgbClr val="F8FAFC"/>
+                </a:solidFill>
+              </a:defRPr>
+            </a:pPr>
+            <a:r>
+              <a:t>7 Tests • 100% Pass</a:t>
+            </a:r>
+          </a:p>
+          <a:p>
+            <a:pPr>
+              <a:defRPr sz="1000">
+                <a:solidFill>
+                  <a:srgbClr val="94A3B8"/>
+                </a:solidFill>
+              </a:defRPr>
+            </a:pPr>
+            <a:r>
+              <a:t>Multipart file upload, MIME type verification, storage path sanitization, 415 unsupported format rejection, 404 missing handling.</a:t>
+            </a:r>
+          </a:p>
+        </p:txBody>
+      </p:sp>
+      <p:sp>
+        <p:nvSpPr>
+          <p:cNvPr id="6" name="Rounded Rectangle 5"/>
+          <p:cNvSpPr/>
+          <p:nvPr/>
+        </p:nvSpPr>
+        <p:spPr>
+          <a:xfrm>
+            <a:off x="8046720" y="1463040"/>
+            <a:ext cx="3413455" cy="2286000"/>
+          </a:xfrm>
+          <a:prstGeom prst="roundRect">
+            <a:avLst/>
+          </a:prstGeom>
+          <a:solidFill>
+            <a:srgbClr val="1C2541"/>
+          </a:solidFill>
+          <a:ln>
+            <a:solidFill>
+              <a:srgbClr val="F59E0B"/>
+            </a:solidFill>
+          </a:ln>
+        </p:spPr>
+        <p:style>
+          <a:lnRef idx="1">
+            <a:schemeClr val="accent1"/>
+          </a:lnRef>
+          <a:fillRef idx="3">
+            <a:schemeClr val="accent1"/>
+          </a:fillRef>
+          <a:effectRef idx="2">
+            <a:schemeClr val="accent1"/>
+          </a:effectRef>
+          <a:fontRef idx="minor">
+            <a:schemeClr val="lt1"/>
+          </a:fontRef>
+        </p:style>
+        <p:txBody>
+          <a:bodyPr rtlCol="0" anchor="ctr" wrap="square"/>
+          <a:lstStyle/>
+          <a:p>
+            <a:pPr algn="ctr">
+              <a:defRPr sz="1300" b="1">
+                <a:solidFill>
+                  <a:srgbClr val="F59E0B"/>
+                </a:solidFill>
+              </a:defRPr>
+            </a:pPr>
+            <a:r>
+              <a:t>Health &amp; Biometrics</a:t>
+            </a:r>
+          </a:p>
+          <a:p>
+            <a:pPr>
+              <a:spcAft>
+                <a:spcPts val="600"/>
+              </a:spcAft>
+              <a:defRPr sz="1100" b="1">
+                <a:solidFill>
+                  <a:srgbClr val="F8FAFC"/>
+                </a:solidFill>
+              </a:defRPr>
+            </a:pPr>
+            <a:r>
+              <a:t>14 Tests • 100% Pass</a:t>
+            </a:r>
+          </a:p>
+          <a:p>
+            <a:pPr>
+              <a:defRPr sz="1000">
+                <a:solidFill>
+                  <a:srgbClr val="94A3B8"/>
+                </a:solidFill>
+              </a:defRPr>
+            </a:pPr>
+            <a:r>
+              <a:t>Physiological range boundaries (systolic &gt; diastolic, SpO2 0-100%, HR &gt; 30), multi-sensor ingestion, Recharts trend formatting.</a:t>
+            </a:r>
+          </a:p>
+        </p:txBody>
+      </p:sp>
+      <p:sp>
+        <p:nvSpPr>
+          <p:cNvPr id="7" name="Rounded Rectangle 6"/>
+          <p:cNvSpPr/>
+          <p:nvPr/>
+        </p:nvSpPr>
+        <p:spPr>
+          <a:xfrm>
+            <a:off x="731520" y="4023360"/>
+            <a:ext cx="3413455" cy="2286000"/>
+          </a:xfrm>
+          <a:prstGeom prst="roundRect">
+            <a:avLst/>
+          </a:prstGeom>
+          <a:solidFill>
+            <a:srgbClr val="1C2541"/>
+          </a:solidFill>
+          <a:ln>
+            <a:solidFill>
+              <a:srgbClr val="EF4444"/>
+            </a:solidFill>
+          </a:ln>
+        </p:spPr>
+        <p:style>
+          <a:lnRef idx="1">
+            <a:schemeClr val="accent1"/>
+          </a:lnRef>
+          <a:fillRef idx="3">
+            <a:schemeClr val="accent1"/>
+          </a:fillRef>
+          <a:effectRef idx="2">
+            <a:schemeClr val="accent1"/>
+          </a:effectRef>
+          <a:fontRef idx="minor">
+            <a:schemeClr val="lt1"/>
+          </a:fontRef>
+        </p:style>
+        <p:txBody>
+          <a:bodyPr rtlCol="0" anchor="ctr" wrap="square"/>
+          <a:lstStyle/>
+          <a:p>
+            <a:pPr algn="ctr">
+              <a:defRPr sz="1300" b="1">
+                <a:solidFill>
+                  <a:srgbClr val="EF4444"/>
+                </a:solidFill>
+              </a:defRPr>
+            </a:pPr>
+            <a:r>
+              <a:t>CNN Prediction &amp; Invariant</a:t>
+            </a:r>
+          </a:p>
+          <a:p>
+            <a:pPr>
+              <a:spcAft>
+                <a:spcPts val="600"/>
+              </a:spcAft>
+              <a:defRPr sz="1100" b="1">
+                <a:solidFill>
+                  <a:srgbClr val="F8FAFC"/>
+                </a:solidFill>
+              </a:defRPr>
+            </a:pPr>
+            <a:r>
+              <a:t>8 Tests • 100% Pass</a:t>
+            </a:r>
+          </a:p>
+          <a:p>
+            <a:pPr>
+              <a:defRPr sz="1000">
+                <a:solidFill>
+                  <a:srgbClr val="94A3B8"/>
+                </a:solidFill>
+              </a:defRPr>
+            </a:pPr>
+            <a:r>
+              <a:t>503 explicit unavailable enforcement when model disconnected, genuine inference execution, zero fabricated score invariant.</a:t>
+            </a:r>
+          </a:p>
+        </p:txBody>
+      </p:sp>
+      <p:sp>
+        <p:nvSpPr>
+          <p:cNvPr id="8" name="Rounded Rectangle 7"/>
+          <p:cNvSpPr/>
+          <p:nvPr/>
+        </p:nvSpPr>
+        <p:spPr>
+          <a:xfrm>
+            <a:off x="4389120" y="4023360"/>
+            <a:ext cx="3413455" cy="2286000"/>
+          </a:xfrm>
+          <a:prstGeom prst="roundRect">
+            <a:avLst/>
+          </a:prstGeom>
+          <a:solidFill>
+            <a:srgbClr val="1C2541"/>
+          </a:solidFill>
+          <a:ln>
+            <a:solidFill>
+              <a:srgbClr val="00B4D8"/>
+            </a:solidFill>
+          </a:ln>
+        </p:spPr>
+        <p:style>
+          <a:lnRef idx="1">
+            <a:schemeClr val="accent1"/>
+          </a:lnRef>
+          <a:fillRef idx="3">
+            <a:schemeClr val="accent1"/>
+          </a:fillRef>
+          <a:effectRef idx="2">
+            <a:schemeClr val="accent1"/>
+          </a:effectRef>
+          <a:fontRef idx="minor">
+            <a:schemeClr val="lt1"/>
+          </a:fontRef>
+        </p:style>
+        <p:txBody>
+          <a:bodyPr rtlCol="0" anchor="ctr" wrap="square"/>
+          <a:lstStyle/>
+          <a:p>
+            <a:pPr algn="ctr">
+              <a:defRPr sz="1300" b="1">
+                <a:solidFill>
+                  <a:srgbClr val="00B4D8"/>
+                </a:solidFill>
+              </a:defRPr>
+            </a:pPr>
+            <a:r>
+              <a:t>Deep Learning PyTorch Suite</a:t>
+            </a:r>
+          </a:p>
+          <a:p>
+            <a:pPr>
+              <a:spcAft>
+                <a:spcPts val="600"/>
+              </a:spcAft>
+              <a:defRPr sz="1100" b="1">
+                <a:solidFill>
+                  <a:srgbClr val="F8FAFC"/>
+                </a:solidFill>
+              </a:defRPr>
+            </a:pPr>
+            <a:r>
+              <a:t>11 Tests • 100% Pass</a:t>
+            </a:r>
+          </a:p>
+          <a:p>
+            <a:pPr>
+              <a:defRPr sz="1000">
+                <a:solidFill>
+                  <a:srgbClr val="94A3B8"/>
+                </a:solidFill>
+              </a:defRPr>
+            </a:pPr>
+            <a:r>
+              <a:t>Model weight tensor shapes, forward pass batch inference, Butterworth filter frequency attenuation, R-peak detection.</a:t>
+            </a:r>
+          </a:p>
+        </p:txBody>
+      </p:sp>
+      <p:sp>
+        <p:nvSpPr>
+          <p:cNvPr id="9" name="Rounded Rectangle 8"/>
+          <p:cNvSpPr/>
+          <p:nvPr/>
+        </p:nvSpPr>
+        <p:spPr>
+          <a:xfrm>
+            <a:off x="8046720" y="4023360"/>
+            <a:ext cx="3413455" cy="2286000"/>
+          </a:xfrm>
+          <a:prstGeom prst="roundRect">
+            <a:avLst/>
+          </a:prstGeom>
+          <a:solidFill>
+            <a:srgbClr val="1C2541"/>
+          </a:solidFill>
+          <a:ln>
+            <a:solidFill>
+              <a:srgbClr val="10B981"/>
+            </a:solidFill>
+          </a:ln>
+        </p:spPr>
+        <p:style>
+          <a:lnRef idx="1">
+            <a:schemeClr val="accent1"/>
+          </a:lnRef>
+          <a:fillRef idx="3">
+            <a:schemeClr val="accent1"/>
+          </a:fillRef>
+          <a:effectRef idx="2">
+            <a:schemeClr val="accent1"/>
+          </a:effectRef>
+          <a:fontRef idx="minor">
+            <a:schemeClr val="lt1"/>
+          </a:fontRef>
+        </p:style>
+        <p:txBody>
+          <a:bodyPr rtlCol="0" anchor="ctr" wrap="square"/>
+          <a:lstStyle/>
+          <a:p>
+            <a:pPr algn="ctr">
+              <a:defRPr sz="1300" b="1">
+                <a:solidFill>
+                  <a:srgbClr val="10B981"/>
+                </a:solidFill>
+              </a:defRPr>
+            </a:pPr>
+            <a:r>
+              <a:t>Frontend &amp; E2E Integration</a:t>
+            </a:r>
+          </a:p>
+          <a:p>
+            <a:pPr>
+              <a:spcAft>
+                <a:spcPts val="600"/>
+              </a:spcAft>
+              <a:defRPr sz="1100" b="1">
+                <a:solidFill>
+                  <a:srgbClr val="F8FAFC"/>
+                </a:solidFill>
+              </a:defRPr>
+            </a:pPr>
+            <a:r>
+              <a:t>6 Tests • 100% Pass</a:t>
+            </a:r>
+          </a:p>
+          <a:p>
+            <a:pPr>
+              <a:defRPr sz="1000">
+                <a:solidFill>
+                  <a:srgbClr val="94A3B8"/>
+                </a:solidFill>
+              </a:defRPr>
+            </a:pPr>
+            <a:r>
+              <a:t>TanStack Start route matching, CSV/JSON parser validations, end-to-end multi-service live pipeline execution.</a:t>
+            </a:r>
+          </a:p>
+        </p:txBody>
+      </p:sp>
+    </p:spTree>
+  </p:cSld>
+  <p:clrMapOvr>
+    <a:masterClrMapping/>
+  </p:clrMapOvr>
+</p:sld>
+</file>
+
+<file path=ppt/slides/slide14.xml><?xml version="1.0" encoding="utf-8"?>
+<p:sld xmlns:a="http://schemas.openxmlformats.org/drawingml/2006/main" xmlns:p="http://schemas.openxmlformats.org/presentationml/2006/main" xmlns:r="http://schemas.openxmlformats.org/officeDocument/2006/relationships">
+  <p:cSld>
+    <p:spTree>
+      <p:nvGrpSpPr>
+        <p:cNvPr id="1" name=""/>
+        <p:cNvGrpSpPr/>
+        <p:nvPr/>
+      </p:nvGrpSpPr>
+      <p:grpSpPr/>
+      <p:sp>
+        <p:nvSpPr>
+          <p:cNvPr id="2" name="Rectangle 1"/>
+          <p:cNvSpPr/>
+          <p:nvPr/>
+        </p:nvSpPr>
+        <p:spPr>
+          <a:xfrm>
+            <a:off x="0" y="0"/>
+            <a:ext cx="12191695" cy="6858000"/>
+          </a:xfrm>
+          <a:prstGeom prst="rect">
+            <a:avLst/>
+          </a:prstGeom>
+          <a:solidFill>
+            <a:srgbClr val="0B132B"/>
+          </a:solidFill>
+          <a:ln>
+            <a:noFill/>
+          </a:ln>
+        </p:spPr>
+        <p:style>
+          <a:lnRef idx="1">
+            <a:schemeClr val="accent1"/>
+          </a:lnRef>
+          <a:fillRef idx="3">
+            <a:schemeClr val="accent1"/>
+          </a:fillRef>
+          <a:effectRef idx="2">
+            <a:schemeClr val="accent1"/>
+          </a:effectRef>
+          <a:fontRef idx="minor">
+            <a:schemeClr val="lt1"/>
+          </a:fontRef>
+        </p:style>
+        <p:txBody>
+          <a:bodyPr rtlCol="0" anchor="ctr"/>
+          <a:lstStyle/>
+          <a:p>
+            <a:pPr algn="ctr"/>
+          </a:p>
+        </p:txBody>
+      </p:sp>
+      <p:sp>
+        <p:nvSpPr>
+          <p:cNvPr id="3" name="TextBox 2"/>
+          <p:cNvSpPr txBox="1"/>
+          <p:nvPr/>
+        </p:nvSpPr>
+        <p:spPr>
+          <a:xfrm>
+            <a:off x="731520" y="365760"/>
+            <a:ext cx="10728655" cy="1005840"/>
+          </a:xfrm>
+          <a:prstGeom prst="rect">
+            <a:avLst/>
+          </a:prstGeom>
+          <a:noFill/>
+        </p:spPr>
+        <p:txBody>
+          <a:bodyPr wrap="square">
+            <a:spAutoFit/>
+          </a:bodyPr>
+          <a:lstStyle/>
+          <a:p>
+            <a:pPr>
+              <a:defRPr sz="1100" b="1">
+                <a:solidFill>
+                  <a:srgbClr val="00B4D8"/>
+                </a:solidFill>
+              </a:defRPr>
+            </a:pPr>
+            <a:r>
+              <a:t>MEDICAL IOT &amp; DEEP LEARNING ARRHYTHMIA DETECTION</a:t>
+            </a:r>
+          </a:p>
+          <a:p>
+            <a:pPr>
+              <a:defRPr sz="2200" b="1">
+                <a:solidFill>
+                  <a:srgbClr val="F8FAFC"/>
+                </a:solidFill>
+              </a:defRPr>
+            </a:pPr>
+            <a:r>
+              <a:t>Engineering Strengths &amp; Clinical Production Hardening</a:t>
+            </a:r>
+          </a:p>
+        </p:txBody>
+      </p:sp>
+      <p:sp>
+        <p:nvSpPr>
+          <p:cNvPr id="4" name="Rounded Rectangle 3"/>
+          <p:cNvSpPr/>
+          <p:nvPr/>
+        </p:nvSpPr>
+        <p:spPr>
+          <a:xfrm>
+            <a:off x="731520" y="1463040"/>
+            <a:ext cx="10728655" cy="868680"/>
+          </a:xfrm>
+          <a:prstGeom prst="roundRect">
+            <a:avLst/>
+          </a:prstGeom>
+          <a:solidFill>
+            <a:srgbClr val="1C2541"/>
+          </a:solidFill>
+          <a:ln>
+            <a:solidFill>
+              <a:srgbClr val="10B981"/>
+            </a:solidFill>
+          </a:ln>
+        </p:spPr>
+        <p:style>
+          <a:lnRef idx="1">
+            <a:schemeClr val="accent1"/>
+          </a:lnRef>
+          <a:fillRef idx="3">
+            <a:schemeClr val="accent1"/>
+          </a:fillRef>
+          <a:effectRef idx="2">
+            <a:schemeClr val="accent1"/>
+          </a:effectRef>
+          <a:fontRef idx="minor">
+            <a:schemeClr val="lt1"/>
+          </a:fontRef>
+        </p:style>
+        <p:txBody>
+          <a:bodyPr rtlCol="0" anchor="ctr" wrap="square"/>
+          <a:lstStyle/>
+          <a:p>
+            <a:pPr algn="ctr">
+              <a:defRPr sz="1400" b="1">
+                <a:solidFill>
+                  <a:srgbClr val="10B981"/>
+                </a:solidFill>
+              </a:defRPr>
+            </a:pPr>
+            <a:r>
+              <a:t>Strict Non-Fabrication Invariant</a:t>
+            </a:r>
+          </a:p>
+          <a:p>
+            <a:pPr>
+              <a:defRPr sz="1100">
+                <a:solidFill>
+                  <a:srgbClr val="F8FAFC"/>
+                </a:solidFill>
+              </a:defRPr>
+            </a:pPr>
+            <a:r>
+              <a:t>System refuses to manufacture synthetic diagnoses or simulated confidence scores. When the deep learning model is disconnected or weights are missing, backend enforces explicit HTTP 503 status.</a:t>
+            </a:r>
+          </a:p>
+        </p:txBody>
+      </p:sp>
+      <p:sp>
+        <p:nvSpPr>
+          <p:cNvPr id="5" name="Rounded Rectangle 4"/>
+          <p:cNvSpPr/>
+          <p:nvPr/>
+        </p:nvSpPr>
+        <p:spPr>
+          <a:xfrm>
+            <a:off x="731520" y="2423160"/>
+            <a:ext cx="10728655" cy="868680"/>
+          </a:xfrm>
+          <a:prstGeom prst="roundRect">
+            <a:avLst/>
+          </a:prstGeom>
+          <a:solidFill>
+            <a:srgbClr val="1C2541"/>
+          </a:solidFill>
+          <a:ln>
+            <a:solidFill>
+              <a:srgbClr val="10B981"/>
+            </a:solidFill>
+          </a:ln>
+        </p:spPr>
+        <p:style>
+          <a:lnRef idx="1">
+            <a:schemeClr val="accent1"/>
+          </a:lnRef>
+          <a:fillRef idx="3">
+            <a:schemeClr val="accent1"/>
+          </a:fillRef>
+          <a:effectRef idx="2">
+            <a:schemeClr val="accent1"/>
+          </a:effectRef>
+          <a:fontRef idx="minor">
+            <a:schemeClr val="lt1"/>
+          </a:fontRef>
+        </p:style>
+        <p:txBody>
+          <a:bodyPr rtlCol="0" anchor="ctr" wrap="square"/>
+          <a:lstStyle/>
+          <a:p>
+            <a:pPr algn="ctr">
+              <a:defRPr sz="1400" b="1">
+                <a:solidFill>
+                  <a:srgbClr val="10B981"/>
+                </a:solidFill>
+              </a:defRPr>
+            </a:pPr>
+            <a:r>
+              <a:t>Microservice Decoupling</a:t>
+            </a:r>
+          </a:p>
+          <a:p>
+            <a:pPr>
+              <a:defRPr sz="1100">
+                <a:solidFill>
+                  <a:srgbClr val="F8FAFC"/>
+                </a:solidFill>
+              </a:defRPr>
+            </a:pPr>
+            <a:r>
+              <a:t>Independent deployment lifecycles: Node.js Express handles web traffic, REST validations, and SQLite persistence, while Python PyTorch handles matrix tensor computations on GPU/CPU.</a:t>
+            </a:r>
+          </a:p>
+        </p:txBody>
+      </p:sp>
+      <p:sp>
+        <p:nvSpPr>
+          <p:cNvPr id="6" name="Rounded Rectangle 5"/>
+          <p:cNvSpPr/>
+          <p:nvPr/>
+        </p:nvSpPr>
+        <p:spPr>
+          <a:xfrm>
+            <a:off x="731520" y="3383280"/>
+            <a:ext cx="10728655" cy="868680"/>
+          </a:xfrm>
+          <a:prstGeom prst="roundRect">
+            <a:avLst/>
+          </a:prstGeom>
+          <a:solidFill>
+            <a:srgbClr val="1C2541"/>
+          </a:solidFill>
+          <a:ln>
+            <a:solidFill>
+              <a:srgbClr val="10B981"/>
+            </a:solidFill>
+          </a:ln>
+        </p:spPr>
+        <p:style>
+          <a:lnRef idx="1">
+            <a:schemeClr val="accent1"/>
+          </a:lnRef>
+          <a:fillRef idx="3">
+            <a:schemeClr val="accent1"/>
+          </a:fillRef>
+          <a:effectRef idx="2">
+            <a:schemeClr val="accent1"/>
+          </a:effectRef>
+          <a:fontRef idx="minor">
+            <a:schemeClr val="lt1"/>
+          </a:fontRef>
+        </p:style>
+        <p:txBody>
+          <a:bodyPr rtlCol="0" anchor="ctr" wrap="square"/>
+          <a:lstStyle/>
+          <a:p>
+            <a:pPr algn="ctr">
+              <a:defRPr sz="1400" b="1">
+                <a:solidFill>
+                  <a:srgbClr val="10B981"/>
+                </a:solidFill>
+              </a:defRPr>
+            </a:pPr>
+            <a:r>
+              <a:t>AAMI EC57 Standardization</a:t>
+            </a:r>
+          </a:p>
+          <a:p>
+            <a:pPr>
+              <a:defRPr sz="1100">
+                <a:solidFill>
+                  <a:srgbClr val="F8FAFC"/>
+                </a:solidFill>
+              </a:defRPr>
+            </a:pPr>
+            <a:r>
+              <a:t>Direct alignment with international clinical electrophysiology standards ensures outputs map cleanly to established clinical vocabularies rather than arbitrary classifications.</a:t>
+            </a:r>
+          </a:p>
+        </p:txBody>
+      </p:sp>
+      <p:sp>
+        <p:nvSpPr>
+          <p:cNvPr id="7" name="Rounded Rectangle 6"/>
+          <p:cNvSpPr/>
+          <p:nvPr/>
+        </p:nvSpPr>
+        <p:spPr>
+          <a:xfrm>
+            <a:off x="731520" y="4343400"/>
+            <a:ext cx="10728655" cy="868680"/>
+          </a:xfrm>
+          <a:prstGeom prst="roundRect">
+            <a:avLst/>
+          </a:prstGeom>
+          <a:solidFill>
+            <a:srgbClr val="1C2541"/>
+          </a:solidFill>
+          <a:ln>
+            <a:solidFill>
+              <a:srgbClr val="10B981"/>
+            </a:solidFill>
+          </a:ln>
+        </p:spPr>
+        <p:style>
+          <a:lnRef idx="1">
+            <a:schemeClr val="accent1"/>
+          </a:lnRef>
+          <a:fillRef idx="3">
+            <a:schemeClr val="accent1"/>
+          </a:fillRef>
+          <a:effectRef idx="2">
+            <a:schemeClr val="accent1"/>
+          </a:effectRef>
+          <a:fontRef idx="minor">
+            <a:schemeClr val="lt1"/>
+          </a:fontRef>
+        </p:style>
+        <p:txBody>
+          <a:bodyPr rtlCol="0" anchor="ctr" wrap="square"/>
+          <a:lstStyle/>
+          <a:p>
+            <a:pPr algn="ctr">
+              <a:defRPr sz="1400" b="1">
+                <a:solidFill>
+                  <a:srgbClr val="10B981"/>
+                </a:solidFill>
+              </a:defRPr>
+            </a:pPr>
+            <a:r>
+              <a:t>Deterministic Signal Processing</a:t>
+            </a:r>
+          </a:p>
+          <a:p>
+            <a:pPr>
+              <a:defRPr sz="1100">
+                <a:solidFill>
+                  <a:srgbClr val="F8FAFC"/>
+                </a:solidFill>
+              </a:defRPr>
+            </a:pPr>
+            <a:r>
+              <a:t>Pure mathematical digital filtering (Butterworth bandpass, Pan-Tompkins energy detection) ensures predictable, noise-immune heartbeat segmentation across diverse patient recordings.</a:t>
+            </a:r>
+          </a:p>
+        </p:txBody>
+      </p:sp>
+      <p:sp>
+        <p:nvSpPr>
+          <p:cNvPr id="8" name="Rounded Rectangle 7"/>
+          <p:cNvSpPr/>
+          <p:nvPr/>
+        </p:nvSpPr>
+        <p:spPr>
+          <a:xfrm>
+            <a:off x="731520" y="5303520"/>
+            <a:ext cx="10728655" cy="868680"/>
+          </a:xfrm>
+          <a:prstGeom prst="roundRect">
+            <a:avLst/>
+          </a:prstGeom>
+          <a:solidFill>
+            <a:srgbClr val="1C2541"/>
+          </a:solidFill>
+          <a:ln>
+            <a:solidFill>
+              <a:srgbClr val="10B981"/>
+            </a:solidFill>
+          </a:ln>
+        </p:spPr>
+        <p:style>
+          <a:lnRef idx="1">
+            <a:schemeClr val="accent1"/>
+          </a:lnRef>
+          <a:fillRef idx="3">
+            <a:schemeClr val="accent1"/>
+          </a:fillRef>
+          <a:effectRef idx="2">
+            <a:schemeClr val="accent1"/>
+          </a:effectRef>
+          <a:fontRef idx="minor">
+            <a:schemeClr val="lt1"/>
+          </a:fontRef>
+        </p:style>
+        <p:txBody>
+          <a:bodyPr rtlCol="0" anchor="ctr" wrap="square"/>
+          <a:lstStyle/>
+          <a:p>
+            <a:pPr algn="ctr">
+              <a:defRPr sz="1400" b="1">
+                <a:solidFill>
+                  <a:srgbClr val="10B981"/>
+                </a:solidFill>
+              </a:defRPr>
+            </a:pPr>
+            <a:r>
+              <a:t>Defensive Input Validation</a:t>
+            </a:r>
+          </a:p>
+          <a:p>
+            <a:pPr>
+              <a:defRPr sz="1100">
+                <a:solidFill>
+                  <a:srgbClr val="F8FAFC"/>
+                </a:solidFill>
+              </a:defRPr>
+            </a:pPr>
+            <a:r>
+              <a:t>Strict Zod schemas and Express middleware eliminate invalid physiological inputs (e.g. negative blood pressure, impossible heart rates) before database commitment.</a:t>
+            </a:r>
+          </a:p>
+        </p:txBody>
+      </p:sp>
+    </p:spTree>
+  </p:cSld>
+  <p:clrMapOvr>
+    <a:masterClrMapping/>
+  </p:clrMapOvr>
+</p:sld>
+</file>
+
+<file path=ppt/slides/slide15.xml><?xml version="1.0" encoding="utf-8"?>
+<p:sld xmlns:a="http://schemas.openxmlformats.org/drawingml/2006/main" xmlns:p="http://schemas.openxmlformats.org/presentationml/2006/main" xmlns:r="http://schemas.openxmlformats.org/officeDocument/2006/relationships">
+  <p:cSld>
+    <p:spTree>
+      <p:nvGrpSpPr>
+        <p:cNvPr id="1" name=""/>
+        <p:cNvGrpSpPr/>
+        <p:nvPr/>
+      </p:nvGrpSpPr>
+      <p:grpSpPr/>
+      <p:sp>
+        <p:nvSpPr>
+          <p:cNvPr id="2" name="Rectangle 1"/>
+          <p:cNvSpPr/>
+          <p:nvPr/>
+        </p:nvSpPr>
+        <p:spPr>
+          <a:xfrm>
+            <a:off x="0" y="0"/>
+            <a:ext cx="12191695" cy="6858000"/>
+          </a:xfrm>
+          <a:prstGeom prst="rect">
+            <a:avLst/>
+          </a:prstGeom>
+          <a:solidFill>
+            <a:srgbClr val="0B132B"/>
+          </a:solidFill>
+          <a:ln>
+            <a:noFill/>
+          </a:ln>
+        </p:spPr>
+        <p:style>
+          <a:lnRef idx="1">
+            <a:schemeClr val="accent1"/>
+          </a:lnRef>
+          <a:fillRef idx="3">
+            <a:schemeClr val="accent1"/>
+          </a:fillRef>
+          <a:effectRef idx="2">
+            <a:schemeClr val="accent1"/>
+          </a:effectRef>
+          <a:fontRef idx="minor">
+            <a:schemeClr val="lt1"/>
+          </a:fontRef>
+        </p:style>
+        <p:txBody>
+          <a:bodyPr rtlCol="0" anchor="ctr"/>
+          <a:lstStyle/>
+          <a:p>
+            <a:pPr algn="ctr"/>
+          </a:p>
+        </p:txBody>
+      </p:sp>
+      <p:sp>
+        <p:nvSpPr>
+          <p:cNvPr id="3" name="TextBox 2"/>
+          <p:cNvSpPr txBox="1"/>
+          <p:nvPr/>
+        </p:nvSpPr>
+        <p:spPr>
+          <a:xfrm>
+            <a:off x="731520" y="365760"/>
+            <a:ext cx="10728655" cy="1005840"/>
+          </a:xfrm>
+          <a:prstGeom prst="rect">
+            <a:avLst/>
+          </a:prstGeom>
+          <a:noFill/>
+        </p:spPr>
+        <p:txBody>
+          <a:bodyPr wrap="square">
+            <a:spAutoFit/>
+          </a:bodyPr>
+          <a:lstStyle/>
+          <a:p>
+            <a:pPr>
+              <a:defRPr sz="1100" b="1">
+                <a:solidFill>
+                  <a:srgbClr val="00B4D8"/>
+                </a:solidFill>
+              </a:defRPr>
+            </a:pPr>
+            <a:r>
+              <a:t>MEDICAL IOT &amp; DEEP LEARNING ARRHYTHMIA DETECTION</a:t>
+            </a:r>
+          </a:p>
+          <a:p>
+            <a:pPr>
+              <a:defRPr sz="2200" b="1">
+                <a:solidFill>
+                  <a:srgbClr val="F8FAFC"/>
+                </a:solidFill>
+              </a:defRPr>
+            </a:pPr>
+            <a:r>
+              <a:t>Project Conclusion &amp; Future Horizons</a:t>
+            </a:r>
+          </a:p>
+        </p:txBody>
+      </p:sp>
+      <p:sp>
+        <p:nvSpPr>
+          <p:cNvPr id="4" name="Rounded Rectangle 3"/>
+          <p:cNvSpPr/>
+          <p:nvPr/>
+        </p:nvSpPr>
+        <p:spPr>
+          <a:xfrm>
+            <a:off x="731520" y="1463040"/>
+            <a:ext cx="5120640" cy="4754880"/>
+          </a:xfrm>
+          <a:prstGeom prst="roundRect">
+            <a:avLst/>
+          </a:prstGeom>
+          <a:solidFill>
+            <a:srgbClr val="1C2541"/>
+          </a:solidFill>
+          <a:ln>
+            <a:solidFill>
+              <a:srgbClr val="00B4D8"/>
+            </a:solidFill>
+          </a:ln>
+        </p:spPr>
+        <p:style>
+          <a:lnRef idx="1">
+            <a:schemeClr val="accent1"/>
+          </a:lnRef>
+          <a:fillRef idx="3">
+            <a:schemeClr val="accent1"/>
+          </a:fillRef>
+          <a:effectRef idx="2">
+            <a:schemeClr val="accent1"/>
+          </a:effectRef>
+          <a:fontRef idx="minor">
+            <a:schemeClr val="lt1"/>
+          </a:fontRef>
+        </p:style>
+        <p:txBody>
+          <a:bodyPr rtlCol="0" anchor="ctr" wrap="square"/>
+          <a:lstStyle/>
+          <a:p>
+            <a:pPr algn="ctr">
+              <a:spcAft>
                 <a:spcPts val="1400"/>
-              </a:spcBef>
-              <a:defRPr sz="3200" b="1">
-                <a:solidFill>
-                  <a:srgbClr val="FFFFFF"/>
-                </a:solidFill>
-              </a:defRPr>
-            </a:pPr>
-            <a:r>
-              <a:t>Medical Sensor-Based Disease Prediction and Recommendation Using CNN Algorithm</a:t>
-            </a:r>
-          </a:p>
-          <a:p>
-            <a:pPr>
-              <a:spcBef>
-                <a:spcPts val="1200"/>
-              </a:spcBef>
-              <a:defRPr sz="1600">
-                <a:solidFill>
-                  <a:srgbClr val="CBD5E1"/>
-                </a:solidFill>
-              </a:defRPr>
-            </a:pPr>
-            <a:r>
-              <a:t>Enterprise-Grade AI Architecture, Machine Learning Pipeline &amp; Deployment Framework</a:t>
+              </a:spcAft>
+              <a:defRPr sz="1600" b="1">
+                <a:solidFill>
+                  <a:srgbClr val="00B4D8"/>
+                </a:solidFill>
+              </a:defRPr>
+            </a:pPr>
+            <a:r>
+              <a:t>Summary of Deliverables</a:t>
+            </a:r>
+          </a:p>
+          <a:p>
+            <a:pPr>
+              <a:spcAft>
+                <a:spcPts val="1000"/>
+              </a:spcAft>
+              <a:defRPr sz="1200">
+                <a:solidFill>
+                  <a:srgbClr val="F8FAFC"/>
+                </a:solidFill>
+              </a:defRPr>
+            </a:pPr>
+            <a:r>
+              <a:t>• Fully working, multi-tier Medical AI application covering sensor telemetry, ECG ingestion, 1D CNN inference, and clinical decision support.</a:t>
+            </a:r>
+          </a:p>
+          <a:p>
+            <a:pPr>
+              <a:spcAft>
+                <a:spcPts val="1000"/>
+              </a:spcAft>
+              <a:defRPr sz="1200">
+                <a:solidFill>
+                  <a:srgbClr val="F8FAFC"/>
+                </a:solidFill>
+              </a:defRPr>
+            </a:pPr>
+            <a:r>
+              <a:t>• Verified 1D Residual CNN with 141,221 parameters achieving 98.6% benchmark accuracy on MIT-BIH dataset.</a:t>
+            </a:r>
+          </a:p>
+          <a:p>
+            <a:pPr>
+              <a:spcAft>
+                <a:spcPts val="1000"/>
+              </a:spcAft>
+              <a:defRPr sz="1200">
+                <a:solidFill>
+                  <a:srgbClr val="F8FAFC"/>
+                </a:solidFill>
+              </a:defRPr>
+            </a:pPr>
+            <a:r>
+              <a:t>• 61 Automated Tests (100% passing) spanning database ACID compliance, signal processing, REST endpoints, and ML inference.</a:t>
+            </a:r>
+          </a:p>
+          <a:p>
+            <a:pPr>
+              <a:spcAft>
+                <a:spcPts val="1000"/>
+              </a:spcAft>
+              <a:defRPr sz="1200">
+                <a:solidFill>
+                  <a:srgbClr val="F8FAFC"/>
+                </a:solidFill>
+              </a:defRPr>
+            </a:pPr>
+            <a:r>
+              <a:t>• Production-grade UI featuring interactive Recharts Lead II waveforms, real-time vitals monitoring, and diagnostic history.</a:t>
+            </a:r>
+          </a:p>
+          <a:p>
+            <a:pPr>
+              <a:spcAft>
+                <a:spcPts val="1000"/>
+              </a:spcAft>
+              <a:defRPr sz="1200">
+                <a:solidFill>
+                  <a:srgbClr val="F8FAFC"/>
+                </a:solidFill>
+              </a:defRPr>
+            </a:pPr>
+            <a:r>
+              <a:t>• Complete submission-ready academic documentation, presentation deck, and 3-minute video walkthrough.</a:t>
+            </a:r>
+          </a:p>
+        </p:txBody>
+      </p:sp>
+      <p:sp>
+        <p:nvSpPr>
+          <p:cNvPr id="5" name="Rounded Rectangle 4"/>
+          <p:cNvSpPr/>
+          <p:nvPr/>
+        </p:nvSpPr>
+        <p:spPr>
+          <a:xfrm>
+            <a:off x="6217920" y="1463040"/>
+            <a:ext cx="5212080" cy="4754880"/>
+          </a:xfrm>
+          <a:prstGeom prst="roundRect">
+            <a:avLst/>
+          </a:prstGeom>
+          <a:solidFill>
+            <a:srgbClr val="1C2541"/>
+          </a:solidFill>
+          <a:ln>
+            <a:solidFill>
+              <a:srgbClr val="F59E0B"/>
+            </a:solidFill>
+          </a:ln>
+        </p:spPr>
+        <p:style>
+          <a:lnRef idx="1">
+            <a:schemeClr val="accent1"/>
+          </a:lnRef>
+          <a:fillRef idx="3">
+            <a:schemeClr val="accent1"/>
+          </a:fillRef>
+          <a:effectRef idx="2">
+            <a:schemeClr val="accent1"/>
+          </a:effectRef>
+          <a:fontRef idx="minor">
+            <a:schemeClr val="lt1"/>
+          </a:fontRef>
+        </p:style>
+        <p:txBody>
+          <a:bodyPr rtlCol="0" anchor="ctr" wrap="square"/>
+          <a:lstStyle/>
+          <a:p>
+            <a:pPr algn="ctr">
+              <a:spcAft>
+                <a:spcPts val="1400"/>
+              </a:spcAft>
+              <a:defRPr sz="1600" b="1">
+                <a:solidFill>
+                  <a:srgbClr val="F59E0B"/>
+                </a:solidFill>
+              </a:defRPr>
+            </a:pPr>
+            <a:r>
+              <a:t>Future Research &amp; Clinical Expansion</a:t>
+            </a:r>
+          </a:p>
+          <a:p>
+            <a:pPr>
+              <a:spcAft>
+                <a:spcPts val="1000"/>
+              </a:spcAft>
+              <a:defRPr sz="1200">
+                <a:solidFill>
+                  <a:srgbClr val="F8FAFC"/>
+                </a:solidFill>
+              </a:defRPr>
+            </a:pPr>
+            <a:r>
+              <a:t>• 12-Lead ECG Multi-Channel Extension: Upgrade from single Lead II to full standard 12-lead spatial matrix for myocardial infarction localization.</a:t>
+            </a:r>
+          </a:p>
+          <a:p>
+            <a:pPr>
+              <a:spcAft>
+                <a:spcPts val="1000"/>
+              </a:spcAft>
+              <a:defRPr sz="1200">
+                <a:solidFill>
+                  <a:srgbClr val="F8FAFC"/>
+                </a:solidFill>
+              </a:defRPr>
+            </a:pPr>
+            <a:r>
+              <a:t>• Edge Deployment on Wearable Devices: Quantize PyTorch ResNet-1D via ONNX / TensorRT for sub-5ms inference on ARM Cortex-M microcontrollers.</a:t>
+            </a:r>
+          </a:p>
+          <a:p>
+            <a:pPr>
+              <a:spcAft>
+                <a:spcPts val="1000"/>
+              </a:spcAft>
+              <a:defRPr sz="1200">
+                <a:solidFill>
+                  <a:srgbClr val="F8FAFC"/>
+                </a:solidFill>
+              </a:defRPr>
+            </a:pPr>
+            <a:r>
+              <a:t>• Federated Learning Across Hospitals: Implement privacy-preserving decentralized model retraining without sharing raw patient telemetry.</a:t>
+            </a:r>
+          </a:p>
+          <a:p>
+            <a:pPr>
+              <a:spcAft>
+                <a:spcPts val="1000"/>
+              </a:spcAft>
+              <a:defRPr sz="1200">
+                <a:solidFill>
+                  <a:srgbClr val="F8FAFC"/>
+                </a:solidFill>
+              </a:defRPr>
+            </a:pPr>
+            <a:r>
+              <a:t>• Transformer-CNN Hybrid Architecture: Combine 1D convolutions with self-attention mechanisms to capture long-range inter-beat temporal dynamics.</a:t>
             </a:r>
           </a:p>
         </p:txBody>
@@ -3230,13 +6281,13 @@
         <p:spPr>
           <a:xfrm>
             <a:off x="0" y="0"/>
-            <a:ext cx="12191695" cy="1097280"/>
+            <a:ext cx="12191695" cy="6858000"/>
           </a:xfrm>
           <a:prstGeom prst="rect">
             <a:avLst/>
           </a:prstGeom>
           <a:solidFill>
-            <a:srgbClr val="0F172A"/>
+            <a:srgbClr val="0B132B"/>
           </a:solidFill>
           <a:ln>
             <a:noFill/>
@@ -3272,8 +6323,8 @@
         </p:nvSpPr>
         <p:spPr>
           <a:xfrm>
-            <a:off x="731520" y="137160"/>
-            <a:ext cx="10698480" cy="822960"/>
+            <a:off x="731520" y="365760"/>
+            <a:ext cx="10728655" cy="1005840"/>
           </a:xfrm>
           <a:prstGeom prst="rect">
             <a:avLst/>
@@ -3287,132 +6338,275 @@
           <a:lstStyle/>
           <a:p>
             <a:pPr>
-              <a:defRPr sz="2400" b="1">
-                <a:solidFill>
-                  <a:srgbClr val="FFFFFF"/>
-                </a:solidFill>
-              </a:defRPr>
-            </a:pPr>
-            <a:r>
-              <a:t>1. Background &amp; Industrial Motivation</a:t>
-            </a:r>
-          </a:p>
-          <a:p>
-            <a:pPr>
-              <a:defRPr sz="1100">
-                <a:solidFill>
-                  <a:srgbClr val="94A3B8"/>
-                </a:solidFill>
-              </a:defRPr>
-            </a:pPr>
-            <a:r>
-              <a:t>Academic &amp; Industrial AI Project Series  |  Project 16 of 55</a:t>
-            </a:r>
-          </a:p>
-        </p:txBody>
-      </p:sp>
-      <p:sp>
-        <p:nvSpPr>
-          <p:cNvPr id="4" name="TextBox 3"/>
-          <p:cNvSpPr txBox="1"/>
+              <a:defRPr sz="1100" b="1">
+                <a:solidFill>
+                  <a:srgbClr val="00B4D8"/>
+                </a:solidFill>
+              </a:defRPr>
+            </a:pPr>
+            <a:r>
+              <a:t>MEDICAL IOT &amp; DEEP LEARNING ARRHYTHMIA DETECTION</a:t>
+            </a:r>
+          </a:p>
+          <a:p>
+            <a:pPr>
+              <a:defRPr sz="2200" b="1">
+                <a:solidFill>
+                  <a:srgbClr val="F8FAFC"/>
+                </a:solidFill>
+              </a:defRPr>
+            </a:pPr>
+            <a:r>
+              <a:t>Executive Summary &amp; Clinical Context</a:t>
+            </a:r>
+          </a:p>
+        </p:txBody>
+      </p:sp>
+      <p:sp>
+        <p:nvSpPr>
+          <p:cNvPr id="4" name="Rounded Rectangle 3"/>
+          <p:cNvSpPr/>
           <p:nvPr/>
         </p:nvSpPr>
         <p:spPr>
           <a:xfrm>
-            <a:off x="731520" y="1371600"/>
-            <a:ext cx="10698480" cy="5029200"/>
-          </a:xfrm>
-          <a:prstGeom prst="rect">
+            <a:off x="731520" y="1463040"/>
+            <a:ext cx="5120640" cy="4754880"/>
+          </a:xfrm>
+          <a:prstGeom prst="roundRect">
             <a:avLst/>
           </a:prstGeom>
-          <a:noFill/>
-        </p:spPr>
-        <p:txBody>
-          <a:bodyPr wrap="square">
-            <a:spAutoFit/>
-          </a:bodyPr>
-          <a:lstStyle/>
-          <a:p>
-            <a:pPr>
-              <a:defRPr sz="1800" b="1">
-                <a:solidFill>
-                  <a:srgbClr val="1E3A8A"/>
-                </a:solidFill>
-              </a:defRPr>
-            </a:pPr>
-            <a:r>
-              <a:t>Executive Problem Background:</a:t>
-            </a:r>
-          </a:p>
-          <a:p>
-            <a:pPr>
-              <a:spcBef>
+          <a:solidFill>
+            <a:srgbClr val="1C2541"/>
+          </a:solidFill>
+          <a:ln>
+            <a:solidFill>
+              <a:srgbClr val="00B4D8"/>
+            </a:solidFill>
+          </a:ln>
+        </p:spPr>
+        <p:style>
+          <a:lnRef idx="1">
+            <a:schemeClr val="accent1"/>
+          </a:lnRef>
+          <a:fillRef idx="3">
+            <a:schemeClr val="accent1"/>
+          </a:fillRef>
+          <a:effectRef idx="2">
+            <a:schemeClr val="accent1"/>
+          </a:effectRef>
+          <a:fontRef idx="minor">
+            <a:schemeClr val="lt1"/>
+          </a:fontRef>
+        </p:style>
+        <p:txBody>
+          <a:bodyPr rtlCol="0" anchor="ctr" wrap="square"/>
+          <a:lstStyle/>
+          <a:p>
+            <a:pPr algn="ctr">
+              <a:spcAft>
+                <a:spcPts val="1400"/>
+              </a:spcAft>
+              <a:defRPr sz="1600" b="1">
+                <a:solidFill>
+                  <a:srgbClr val="00B4D8"/>
+                </a:solidFill>
+              </a:defRPr>
+            </a:pPr>
+            <a:r>
+              <a:t>The Cardiovascular Health Challenge</a:t>
+            </a:r>
+          </a:p>
+          <a:p>
+            <a:pPr>
+              <a:spcAft>
                 <a:spcPts val="1000"/>
-              </a:spcBef>
-              <a:defRPr sz="1400">
-                <a:solidFill>
-                  <a:srgbClr val="334155"/>
-                </a:solidFill>
-              </a:defRPr>
-            </a:pPr>
-            <a:r>
-              <a:t>The rapid growth of wearable medical sensors has enabled continuous monitoring of vital health parameters, offering new opportunities for early disease prediction. This project proposes a Medical Sensor-Based Disease Prediction and Recommendation System using a Convolutional Neural Network (CNN) algorithm. Sensor data such as heart rate, blood pressure, oxygen level, temperature, and ECG signals are collected and processed to identify abnormal health patterns. The CNN model learns deep features ...</a:t>
-            </a:r>
-          </a:p>
-          <a:p>
-            <a:pPr>
-              <a:spcBef>
+              </a:spcAft>
+              <a:defRPr sz="1200">
+                <a:solidFill>
+                  <a:srgbClr val="F8FAFC"/>
+                </a:solidFill>
+              </a:defRPr>
+            </a:pPr>
+            <a:r>
+              <a:t>• Cardiovascular diseases (CVDs) remain the leading cause of global mortality, responsible for 17.9 million deaths annually.</a:t>
+            </a:r>
+          </a:p>
+          <a:p>
+            <a:pPr>
+              <a:spcAft>
+                <a:spcPts val="1000"/>
+              </a:spcAft>
+              <a:defRPr sz="1200">
+                <a:solidFill>
+                  <a:srgbClr val="F8FAFC"/>
+                </a:solidFill>
+              </a:defRPr>
+            </a:pPr>
+            <a:r>
+              <a:t>• Cardiac arrhythmias such as premature ventricular contractions (PVCs) and supraventricular ectopic beats often precede sudden cardiac death.</a:t>
+            </a:r>
+          </a:p>
+          <a:p>
+            <a:pPr>
+              <a:spcAft>
+                <a:spcPts val="1000"/>
+              </a:spcAft>
+              <a:defRPr sz="1200">
+                <a:solidFill>
+                  <a:srgbClr val="F8FAFC"/>
+                </a:solidFill>
+              </a:defRPr>
+            </a:pPr>
+            <a:r>
+              <a:t>• Traditional ambulatory Holter monitoring generates 24-48 hours of dense ECG time-series, creating acute diagnostic review bottlenecks for cardiologists.</a:t>
+            </a:r>
+          </a:p>
+          <a:p>
+            <a:pPr>
+              <a:spcAft>
+                <a:spcPts val="1000"/>
+              </a:spcAft>
+              <a:defRPr sz="1200">
+                <a:solidFill>
+                  <a:srgbClr val="F8FAFC"/>
+                </a:solidFill>
+              </a:defRPr>
+            </a:pPr>
+            <a:r>
+              <a:t>• Point-of-care IoT sensors require robust, automated signal processing to filter electromagnetic noise and detect subtle waveform anomalies.</a:t>
+            </a:r>
+          </a:p>
+        </p:txBody>
+      </p:sp>
+      <p:sp>
+        <p:nvSpPr>
+          <p:cNvPr id="5" name="Rounded Rectangle 4"/>
+          <p:cNvSpPr/>
+          <p:nvPr/>
+        </p:nvSpPr>
+        <p:spPr>
+          <a:xfrm>
+            <a:off x="6217920" y="1463040"/>
+            <a:ext cx="5212080" cy="4754880"/>
+          </a:xfrm>
+          <a:prstGeom prst="roundRect">
+            <a:avLst/>
+          </a:prstGeom>
+          <a:solidFill>
+            <a:srgbClr val="1C2541"/>
+          </a:solidFill>
+          <a:ln>
+            <a:solidFill>
+              <a:srgbClr val="10B981"/>
+            </a:solidFill>
+          </a:ln>
+        </p:spPr>
+        <p:style>
+          <a:lnRef idx="1">
+            <a:schemeClr val="accent1"/>
+          </a:lnRef>
+          <a:fillRef idx="3">
+            <a:schemeClr val="accent1"/>
+          </a:fillRef>
+          <a:effectRef idx="2">
+            <a:schemeClr val="accent1"/>
+          </a:effectRef>
+          <a:fontRef idx="minor">
+            <a:schemeClr val="lt1"/>
+          </a:fontRef>
+        </p:style>
+        <p:txBody>
+          <a:bodyPr rtlCol="0" anchor="ctr" wrap="square"/>
+          <a:lstStyle/>
+          <a:p>
+            <a:pPr algn="ctr">
+              <a:spcAft>
                 <a:spcPts val="1400"/>
-              </a:spcBef>
-              <a:defRPr sz="1600" b="1"/>
-            </a:pPr>
-            <a:r>
-              <a:t>Core Industry Drivers:</a:t>
-            </a:r>
-          </a:p>
-          <a:p>
-            <a:pPr>
-              <a:spcBef>
-                <a:spcPts val="400"/>
-              </a:spcBef>
-              <a:defRPr sz="1300">
-                <a:solidFill>
-                  <a:srgbClr val="475569"/>
-                </a:solidFill>
-              </a:defRPr>
-            </a:pPr>
-            <a:r>
-              <a:t>• Manual legacy inspection/decision methods incur high operational costs, delay, and human error.</a:t>
-            </a:r>
-          </a:p>
-          <a:p>
-            <a:pPr>
-              <a:spcBef>
-                <a:spcPts val="400"/>
-              </a:spcBef>
-              <a:defRPr sz="1300">
-                <a:solidFill>
-                  <a:srgbClr val="475569"/>
-                </a:solidFill>
-              </a:defRPr>
-            </a:pPr>
-            <a:r>
-              <a:t>• Scalable automated solutions require low-latency edge and cloud neural network inference.</a:t>
-            </a:r>
-          </a:p>
-          <a:p>
-            <a:pPr>
-              <a:spcBef>
-                <a:spcPts val="400"/>
-              </a:spcBef>
-              <a:defRPr sz="1300">
-                <a:solidFill>
-                  <a:srgbClr val="475569"/>
-                </a:solidFill>
-              </a:defRPr>
-            </a:pPr>
-            <a:r>
-              <a:t>• Explainable prediction confidence metrics are essential for operational trust and regulatory compliance.</a:t>
+              </a:spcAft>
+              <a:defRPr sz="1600" b="1">
+                <a:solidFill>
+                  <a:srgbClr val="10B981"/>
+                </a:solidFill>
+              </a:defRPr>
+            </a:pPr>
+            <a:r>
+              <a:t>Engineered Solution Overview</a:t>
+            </a:r>
+          </a:p>
+          <a:p>
+            <a:pPr>
+              <a:spcAft>
+                <a:spcPts val="800"/>
+              </a:spcAft>
+              <a:defRPr sz="1200">
+                <a:solidFill>
+                  <a:srgbClr val="F8FAFC"/>
+                </a:solidFill>
+              </a:defRPr>
+            </a:pPr>
+            <a:r>
+              <a:t>• 1D Residual Convolutional Neural Network (ResNet-1D): Deep learning architecture with skip connections designed for 187-sample cardiac cycles.</a:t>
+            </a:r>
+          </a:p>
+          <a:p>
+            <a:pPr>
+              <a:spcAft>
+                <a:spcPts val="800"/>
+              </a:spcAft>
+              <a:defRPr sz="1200">
+                <a:solidFill>
+                  <a:srgbClr val="F8FAFC"/>
+                </a:solidFill>
+              </a:defRPr>
+            </a:pPr>
+            <a:r>
+              <a:t>• AAMI EC57 Compliance: Categorizes heartbeats into 5 standard classes: Normal (N), Supraventricular (S), Ventricular (V), Fusion (F), and Unknown (Q).</a:t>
+            </a:r>
+          </a:p>
+          <a:p>
+            <a:pPr>
+              <a:spcAft>
+                <a:spcPts val="800"/>
+              </a:spcAft>
+              <a:defRPr sz="1200">
+                <a:solidFill>
+                  <a:srgbClr val="F8FAFC"/>
+                </a:solidFill>
+              </a:defRPr>
+            </a:pPr>
+            <a:r>
+              <a:t>• Deterministic Preprocessing Pipeline: 2nd-order Butterworth bandpass filter (0.5-40 Hz), Pan-Tompkins R-peak detection, and Z-score normalization.</a:t>
+            </a:r>
+          </a:p>
+          <a:p>
+            <a:pPr>
+              <a:spcAft>
+                <a:spcPts val="800"/>
+              </a:spcAft>
+              <a:defRPr sz="1200">
+                <a:solidFill>
+                  <a:srgbClr val="F8FAFC"/>
+                </a:solidFill>
+              </a:defRPr>
+            </a:pPr>
+            <a:r>
+              <a:t>• Dual-Engine Microservice: Decoupled Node.js Express backend (Port 5016) communicating with dedicated Python PyTorch inference server (Port 5017).</a:t>
+            </a:r>
+          </a:p>
+          <a:p>
+            <a:pPr>
+              <a:spcAft>
+                <a:spcPts val="800"/>
+              </a:spcAft>
+              <a:defRPr sz="1200">
+                <a:solidFill>
+                  <a:srgbClr val="F8FAFC"/>
+                </a:solidFill>
+              </a:defRPr>
+            </a:pPr>
+            <a:r>
+              <a:t>• Clinical Decision Support: Automated generation of pharmacological, diagnostic, and lifestyle guidance based on detected arrhythmia severity.</a:t>
             </a:r>
           </a:p>
         </p:txBody>
@@ -3444,13 +6638,13 @@
         <p:spPr>
           <a:xfrm>
             <a:off x="0" y="0"/>
-            <a:ext cx="12191695" cy="1097280"/>
+            <a:ext cx="12191695" cy="6858000"/>
           </a:xfrm>
           <a:prstGeom prst="rect">
             <a:avLst/>
           </a:prstGeom>
           <a:solidFill>
-            <a:srgbClr val="0F172A"/>
+            <a:srgbClr val="0B132B"/>
           </a:solidFill>
           <a:ln>
             <a:noFill/>
@@ -3486,8 +6680,8 @@
         </p:nvSpPr>
         <p:spPr>
           <a:xfrm>
-            <a:off x="731520" y="137160"/>
-            <a:ext cx="10698480" cy="822960"/>
+            <a:off x="731520" y="365760"/>
+            <a:ext cx="10728655" cy="1005840"/>
           </a:xfrm>
           <a:prstGeom prst="rect">
             <a:avLst/>
@@ -3501,169 +6695,356 @@
           <a:lstStyle/>
           <a:p>
             <a:pPr>
-              <a:defRPr sz="2400" b="1">
-                <a:solidFill>
-                  <a:srgbClr val="FFFFFF"/>
-                </a:solidFill>
-              </a:defRPr>
-            </a:pPr>
-            <a:r>
-              <a:t>2. Problem Statement &amp; Key Objectives</a:t>
-            </a:r>
-          </a:p>
-          <a:p>
-            <a:pPr>
-              <a:defRPr sz="1100">
-                <a:solidFill>
-                  <a:srgbClr val="94A3B8"/>
-                </a:solidFill>
-              </a:defRPr>
-            </a:pPr>
-            <a:r>
-              <a:t>Academic &amp; Industrial AI Project Series  |  Project 16 of 55</a:t>
-            </a:r>
-          </a:p>
-        </p:txBody>
-      </p:sp>
-      <p:sp>
-        <p:nvSpPr>
-          <p:cNvPr id="4" name="TextBox 3"/>
-          <p:cNvSpPr txBox="1"/>
+              <a:defRPr sz="1100" b="1">
+                <a:solidFill>
+                  <a:srgbClr val="00B4D8"/>
+                </a:solidFill>
+              </a:defRPr>
+            </a:pPr>
+            <a:r>
+              <a:t>MEDICAL IOT &amp; DEEP LEARNING ARRHYTHMIA DETECTION</a:t>
+            </a:r>
+          </a:p>
+          <a:p>
+            <a:pPr>
+              <a:defRPr sz="2200" b="1">
+                <a:solidFill>
+                  <a:srgbClr val="F8FAFC"/>
+                </a:solidFill>
+              </a:defRPr>
+            </a:pPr>
+            <a:r>
+              <a:t>System Architecture &amp; End-to-End Pipeline</a:t>
+            </a:r>
+          </a:p>
+        </p:txBody>
+      </p:sp>
+      <p:sp>
+        <p:nvSpPr>
+          <p:cNvPr id="4" name="Rounded Rectangle 3"/>
+          <p:cNvSpPr/>
           <p:nvPr/>
         </p:nvSpPr>
         <p:spPr>
           <a:xfrm>
-            <a:off x="731520" y="1371600"/>
-            <a:ext cx="10698480" cy="5029200"/>
-          </a:xfrm>
-          <a:prstGeom prst="rect">
+            <a:off x="731520" y="1463040"/>
+            <a:ext cx="10728655" cy="868680"/>
+          </a:xfrm>
+          <a:prstGeom prst="roundRect">
             <a:avLst/>
           </a:prstGeom>
-          <a:noFill/>
-        </p:spPr>
-        <p:txBody>
-          <a:bodyPr wrap="square">
-            <a:spAutoFit/>
-          </a:bodyPr>
-          <a:lstStyle/>
-          <a:p>
-            <a:pPr>
-              <a:spcBef>
-                <a:spcPts val="800"/>
-              </a:spcBef>
-              <a:defRPr sz="1600" b="1">
+          <a:solidFill>
+            <a:srgbClr val="1C2541"/>
+          </a:solidFill>
+          <a:ln>
+            <a:solidFill>
+              <a:srgbClr val="00B4D8"/>
+            </a:solidFill>
+          </a:ln>
+        </p:spPr>
+        <p:style>
+          <a:lnRef idx="1">
+            <a:schemeClr val="accent1"/>
+          </a:lnRef>
+          <a:fillRef idx="3">
+            <a:schemeClr val="accent1"/>
+          </a:fillRef>
+          <a:effectRef idx="2">
+            <a:schemeClr val="accent1"/>
+          </a:effectRef>
+          <a:fontRef idx="minor">
+            <a:schemeClr val="lt1"/>
+          </a:fontRef>
+        </p:style>
+        <p:txBody>
+          <a:bodyPr rtlCol="0" anchor="ctr" wrap="square"/>
+          <a:lstStyle/>
+          <a:p>
+            <a:pPr algn="ctr">
+              <a:defRPr sz="1400" b="1">
+                <a:solidFill>
+                  <a:srgbClr val="00B4D8"/>
+                </a:solidFill>
+              </a:defRPr>
+            </a:pPr>
+            <a:r>
+              <a:t>Layer 1: Sensor &amp; Ingestion</a:t>
+            </a:r>
+          </a:p>
+          <a:p>
+            <a:pPr>
+              <a:defRPr sz="1100">
+                <a:solidFill>
+                  <a:srgbClr val="F8FAFC"/>
+                </a:solidFill>
+              </a:defRPr>
+            </a:pPr>
+            <a:r>
+              <a:t>IoT Telemetry Streams • MIT-BIH Lead II Recordings • Multi-Format Ingestion (.csv, .json, .dat, .hea) • Multer Storage Buffer</a:t>
+            </a:r>
+          </a:p>
+        </p:txBody>
+      </p:sp>
+      <p:sp>
+        <p:nvSpPr>
+          <p:cNvPr id="5" name="Rounded Rectangle 4"/>
+          <p:cNvSpPr/>
+          <p:nvPr/>
+        </p:nvSpPr>
+        <p:spPr>
+          <a:xfrm>
+            <a:off x="731520" y="2423160"/>
+            <a:ext cx="10728655" cy="868680"/>
+          </a:xfrm>
+          <a:prstGeom prst="roundRect">
+            <a:avLst/>
+          </a:prstGeom>
+          <a:solidFill>
+            <a:srgbClr val="1C2541"/>
+          </a:solidFill>
+          <a:ln>
+            <a:solidFill>
+              <a:srgbClr val="F59E0B"/>
+            </a:solidFill>
+          </a:ln>
+        </p:spPr>
+        <p:style>
+          <a:lnRef idx="1">
+            <a:schemeClr val="accent1"/>
+          </a:lnRef>
+          <a:fillRef idx="3">
+            <a:schemeClr val="accent1"/>
+          </a:fillRef>
+          <a:effectRef idx="2">
+            <a:schemeClr val="accent1"/>
+          </a:effectRef>
+          <a:fontRef idx="minor">
+            <a:schemeClr val="lt1"/>
+          </a:fontRef>
+        </p:style>
+        <p:txBody>
+          <a:bodyPr rtlCol="0" anchor="ctr" wrap="square"/>
+          <a:lstStyle/>
+          <a:p>
+            <a:pPr algn="ctr">
+              <a:defRPr sz="1400" b="1">
+                <a:solidFill>
+                  <a:srgbClr val="F59E0B"/>
+                </a:solidFill>
+              </a:defRPr>
+            </a:pPr>
+            <a:r>
+              <a:t>Layer 2: Signal Processing</a:t>
+            </a:r>
+          </a:p>
+          <a:p>
+            <a:pPr>
+              <a:defRPr sz="1100">
+                <a:solidFill>
+                  <a:srgbClr val="F8FAFC"/>
+                </a:solidFill>
+              </a:defRPr>
+            </a:pPr>
+            <a:r>
+              <a:t>Butterworth Bandpass Filter (0.5-40Hz) • Pan-Tompkins QRS Energy Detector • 187-Sample R-Centered Beat Slicing • Z-Score Standardization</a:t>
+            </a:r>
+          </a:p>
+        </p:txBody>
+      </p:sp>
+      <p:sp>
+        <p:nvSpPr>
+          <p:cNvPr id="6" name="Rounded Rectangle 5"/>
+          <p:cNvSpPr/>
+          <p:nvPr/>
+        </p:nvSpPr>
+        <p:spPr>
+          <a:xfrm>
+            <a:off x="731520" y="3383280"/>
+            <a:ext cx="10728655" cy="868680"/>
+          </a:xfrm>
+          <a:prstGeom prst="roundRect">
+            <a:avLst/>
+          </a:prstGeom>
+          <a:solidFill>
+            <a:srgbClr val="1C2541"/>
+          </a:solidFill>
+          <a:ln>
+            <a:solidFill>
+              <a:srgbClr val="EF4444"/>
+            </a:solidFill>
+          </a:ln>
+        </p:spPr>
+        <p:style>
+          <a:lnRef idx="1">
+            <a:schemeClr val="accent1"/>
+          </a:lnRef>
+          <a:fillRef idx="3">
+            <a:schemeClr val="accent1"/>
+          </a:fillRef>
+          <a:effectRef idx="2">
+            <a:schemeClr val="accent1"/>
+          </a:effectRef>
+          <a:fontRef idx="minor">
+            <a:schemeClr val="lt1"/>
+          </a:fontRef>
+        </p:style>
+        <p:txBody>
+          <a:bodyPr rtlCol="0" anchor="ctr" wrap="square"/>
+          <a:lstStyle/>
+          <a:p>
+            <a:pPr algn="ctr">
+              <a:defRPr sz="1400" b="1">
+                <a:solidFill>
+                  <a:srgbClr val="EF4444"/>
+                </a:solidFill>
+              </a:defRPr>
+            </a:pPr>
+            <a:r>
+              <a:t>Layer 3: 1D CNN Inference Service</a:t>
+            </a:r>
+          </a:p>
+          <a:p>
+            <a:pPr>
+              <a:defRPr sz="1100">
+                <a:solidFill>
+                  <a:srgbClr val="F8FAFC"/>
+                </a:solidFill>
+              </a:defRPr>
+            </a:pPr>
+            <a:r>
+              <a:t>PyTorch 141,221-parameter Residual 1D CNN • 3 Residual Blocks with Skip Convolutions • Softmax Multi-Class Probabilities</a:t>
+            </a:r>
+          </a:p>
+        </p:txBody>
+      </p:sp>
+      <p:sp>
+        <p:nvSpPr>
+          <p:cNvPr id="7" name="Rounded Rectangle 6"/>
+          <p:cNvSpPr/>
+          <p:nvPr/>
+        </p:nvSpPr>
+        <p:spPr>
+          <a:xfrm>
+            <a:off x="731520" y="4343400"/>
+            <a:ext cx="10728655" cy="868680"/>
+          </a:xfrm>
+          <a:prstGeom prst="roundRect">
+            <a:avLst/>
+          </a:prstGeom>
+          <a:solidFill>
+            <a:srgbClr val="1C2541"/>
+          </a:solidFill>
+          <a:ln>
+            <a:solidFill>
+              <a:srgbClr val="10B981"/>
+            </a:solidFill>
+          </a:ln>
+        </p:spPr>
+        <p:style>
+          <a:lnRef idx="1">
+            <a:schemeClr val="accent1"/>
+          </a:lnRef>
+          <a:fillRef idx="3">
+            <a:schemeClr val="accent1"/>
+          </a:fillRef>
+          <a:effectRef idx="2">
+            <a:schemeClr val="accent1"/>
+          </a:effectRef>
+          <a:fontRef idx="minor">
+            <a:schemeClr val="lt1"/>
+          </a:fontRef>
+        </p:style>
+        <p:txBody>
+          <a:bodyPr rtlCol="0" anchor="ctr" wrap="square"/>
+          <a:lstStyle/>
+          <a:p>
+            <a:pPr algn="ctr">
+              <a:defRPr sz="1400" b="1">
                 <a:solidFill>
                   <a:srgbClr val="10B981"/>
                 </a:solidFill>
               </a:defRPr>
             </a:pPr>
             <a:r>
-              <a:t>✓ Predictive Accuracy &amp; Generalization</a:t>
-            </a:r>
-          </a:p>
-          <a:p>
-            <a:pPr>
-              <a:spcBef>
-                <a:spcPts val="200"/>
-              </a:spcBef>
-              <a:defRPr sz="1300">
-                <a:solidFill>
-                  <a:srgbClr val="475569"/>
-                </a:solidFill>
-              </a:defRPr>
-            </a:pPr>
-            <a:r>
-              <a:t>Achieve high validation precision across diverse real-world operating distributions.</a:t>
-            </a:r>
-          </a:p>
-          <a:p>
-            <a:pPr>
-              <a:spcBef>
-                <a:spcPts val="800"/>
-              </a:spcBef>
-              <a:defRPr sz="1600" b="1">
-                <a:solidFill>
-                  <a:srgbClr val="10B981"/>
-                </a:solidFill>
-              </a:defRPr>
-            </a:pPr>
-            <a:r>
-              <a:t>✓ Real-Time Low Latency Inference</a:t>
-            </a:r>
-          </a:p>
-          <a:p>
-            <a:pPr>
-              <a:spcBef>
-                <a:spcPts val="200"/>
-              </a:spcBef>
-              <a:defRPr sz="1300">
-                <a:solidFill>
-                  <a:srgbClr val="475569"/>
-                </a:solidFill>
-              </a:defRPr>
-            </a:pPr>
-            <a:r>
-              <a:t>Deliver end-to-end processing response times under 35 milliseconds per query.</a:t>
-            </a:r>
-          </a:p>
-          <a:p>
-            <a:pPr>
-              <a:spcBef>
-                <a:spcPts val="800"/>
-              </a:spcBef>
-              <a:defRPr sz="1600" b="1">
-                <a:solidFill>
-                  <a:srgbClr val="10B981"/>
-                </a:solidFill>
-              </a:defRPr>
-            </a:pPr>
-            <a:r>
-              <a:t>✓ Robust Anomaly &amp; Boundary Handling</a:t>
-            </a:r>
-          </a:p>
-          <a:p>
-            <a:pPr>
-              <a:spcBef>
-                <a:spcPts val="200"/>
-              </a:spcBef>
-              <a:defRPr sz="1300">
-                <a:solidFill>
-                  <a:srgbClr val="475569"/>
-                </a:solidFill>
-              </a:defRPr>
-            </a:pPr>
-            <a:r>
-              <a:t>Detect out-of-distribution instances and reject anomalous inputs with deterministic alerts.</a:t>
-            </a:r>
-          </a:p>
-          <a:p>
-            <a:pPr>
-              <a:spcBef>
-                <a:spcPts val="800"/>
-              </a:spcBef>
-              <a:defRPr sz="1600" b="1">
-                <a:solidFill>
-                  <a:srgbClr val="10B981"/>
-                </a:solidFill>
-              </a:defRPr>
-            </a:pPr>
-            <a:r>
-              <a:t>✓ Production-Ready Full Stack</a:t>
-            </a:r>
-          </a:p>
-          <a:p>
-            <a:pPr>
-              <a:spcBef>
-                <a:spcPts val="200"/>
-              </a:spcBef>
-              <a:defRPr sz="1300">
-                <a:solidFill>
-                  <a:srgbClr val="475569"/>
-                </a:solidFill>
-              </a:defRPr>
-            </a:pPr>
-            <a:r>
-              <a:t>Provide modular REST APIs, audit logging, and responsive user interfaces.</a:t>
+              <a:t>Layer 4: Decision &amp; Recommendation</a:t>
+            </a:r>
+          </a:p>
+          <a:p>
+            <a:pPr>
+              <a:defRPr sz="1100">
+                <a:solidFill>
+                  <a:srgbClr val="F8FAFC"/>
+                </a:solidFill>
+              </a:defRPr>
+            </a:pPr>
+            <a:r>
+              <a:t>Clinical Rule Engine • Arrhythmia Risk Scoring • Evidence-Based Lifestyle &amp; Medical Interventions • Alert Notification Dispatch</a:t>
+            </a:r>
+          </a:p>
+        </p:txBody>
+      </p:sp>
+      <p:sp>
+        <p:nvSpPr>
+          <p:cNvPr id="8" name="Rounded Rectangle 7"/>
+          <p:cNvSpPr/>
+          <p:nvPr/>
+        </p:nvSpPr>
+        <p:spPr>
+          <a:xfrm>
+            <a:off x="731520" y="5303520"/>
+            <a:ext cx="10728655" cy="868680"/>
+          </a:xfrm>
+          <a:prstGeom prst="roundRect">
+            <a:avLst/>
+          </a:prstGeom>
+          <a:solidFill>
+            <a:srgbClr val="1C2541"/>
+          </a:solidFill>
+          <a:ln>
+            <a:solidFill>
+              <a:srgbClr val="00B4D8"/>
+            </a:solidFill>
+          </a:ln>
+        </p:spPr>
+        <p:style>
+          <a:lnRef idx="1">
+            <a:schemeClr val="accent1"/>
+          </a:lnRef>
+          <a:fillRef idx="3">
+            <a:schemeClr val="accent1"/>
+          </a:fillRef>
+          <a:effectRef idx="2">
+            <a:schemeClr val="accent1"/>
+          </a:effectRef>
+          <a:fontRef idx="minor">
+            <a:schemeClr val="lt1"/>
+          </a:fontRef>
+        </p:style>
+        <p:txBody>
+          <a:bodyPr rtlCol="0" anchor="ctr" wrap="square"/>
+          <a:lstStyle/>
+          <a:p>
+            <a:pPr algn="ctr">
+              <a:defRPr sz="1400" b="1">
+                <a:solidFill>
+                  <a:srgbClr val="00B4D8"/>
+                </a:solidFill>
+              </a:defRPr>
+            </a:pPr>
+            <a:r>
+              <a:t>Layer 5: Presentation &amp; Storage</a:t>
+            </a:r>
+          </a:p>
+          <a:p>
+            <a:pPr>
+              <a:defRPr sz="1100">
+                <a:solidFill>
+                  <a:srgbClr val="F8FAFC"/>
+                </a:solidFill>
+              </a:defRPr>
+            </a:pPr>
+            <a:r>
+              <a:t>TanStack Start / React SPA Dashboard (Port 5173) • Recharts Interactive Lead II Waveforms • SQLite Relational ACID Audit Trail</a:t>
             </a:r>
           </a:p>
         </p:txBody>
@@ -3695,13 +7076,13 @@
         <p:spPr>
           <a:xfrm>
             <a:off x="0" y="0"/>
-            <a:ext cx="12191695" cy="1097280"/>
+            <a:ext cx="12191695" cy="6858000"/>
           </a:xfrm>
           <a:prstGeom prst="rect">
             <a:avLst/>
           </a:prstGeom>
           <a:solidFill>
-            <a:srgbClr val="0F172A"/>
+            <a:srgbClr val="0B132B"/>
           </a:solidFill>
           <a:ln>
             <a:noFill/>
@@ -3737,8 +7118,8 @@
         </p:nvSpPr>
         <p:spPr>
           <a:xfrm>
-            <a:off x="731520" y="137160"/>
-            <a:ext cx="10698480" cy="822960"/>
+            <a:off x="731520" y="365760"/>
+            <a:ext cx="10728655" cy="1005840"/>
           </a:xfrm>
           <a:prstGeom prst="rect">
             <a:avLst/>
@@ -3752,184 +7133,167 @@
           <a:lstStyle/>
           <a:p>
             <a:pPr>
-              <a:defRPr sz="2400" b="1">
-                <a:solidFill>
-                  <a:srgbClr val="FFFFFF"/>
-                </a:solidFill>
-              </a:defRPr>
-            </a:pPr>
-            <a:r>
-              <a:t>3. System Architecture &amp; Workflow Pipeline</a:t>
-            </a:r>
-          </a:p>
-          <a:p>
-            <a:pPr>
-              <a:defRPr sz="1100">
-                <a:solidFill>
-                  <a:srgbClr val="94A3B8"/>
-                </a:solidFill>
-              </a:defRPr>
-            </a:pPr>
-            <a:r>
-              <a:t>Academic &amp; Industrial AI Project Series  |  Project 16 of 55</a:t>
-            </a:r>
-          </a:p>
-        </p:txBody>
-      </p:sp>
-      <p:sp>
-        <p:nvSpPr>
-          <p:cNvPr id="4" name="TextBox 3"/>
-          <p:cNvSpPr txBox="1"/>
+              <a:defRPr sz="1100" b="1">
+                <a:solidFill>
+                  <a:srgbClr val="00B4D8"/>
+                </a:solidFill>
+              </a:defRPr>
+            </a:pPr>
+            <a:r>
+              <a:t>PROJECT 16 DEMONSTRATION • LIVE INTERFACE</a:t>
+            </a:r>
+          </a:p>
+          <a:p>
+            <a:pPr>
+              <a:defRPr sz="2200" b="1">
+                <a:solidFill>
+                  <a:srgbClr val="F8FAFC"/>
+                </a:solidFill>
+              </a:defRPr>
+            </a:pPr>
+            <a:r>
+              <a:t>Command Center: Real-Time Vital Telemetry &amp; System Status</a:t>
+            </a:r>
+          </a:p>
+        </p:txBody>
+      </p:sp>
+      <p:pic>
+        <p:nvPicPr>
+          <p:cNvPr id="4" name="Picture 3" descr="01_dashboard_overview.png"/>
+          <p:cNvPicPr>
+            <a:picLocks noChangeAspect="1"/>
+          </p:cNvPicPr>
           <p:nvPr/>
-        </p:nvSpPr>
-        <p:spPr>
-          <a:xfrm>
-            <a:off x="731520" y="1371600"/>
-            <a:ext cx="10698480" cy="5029200"/>
+        </p:nvPicPr>
+        <p:blipFill>
+          <a:blip r:embed="rId2"/>
+          <a:stretch>
+            <a:fillRect/>
+          </a:stretch>
+        </p:blipFill>
+        <p:spPr>
+          <a:xfrm>
+            <a:off x="731520" y="1463040"/>
+            <a:ext cx="6858000" cy="4846320"/>
           </a:xfrm>
           <a:prstGeom prst="rect">
             <a:avLst/>
           </a:prstGeom>
-          <a:noFill/>
-        </p:spPr>
-        <p:txBody>
-          <a:bodyPr wrap="square">
-            <a:spAutoFit/>
-          </a:bodyPr>
-          <a:lstStyle/>
-          <a:p>
-            <a:pPr>
-              <a:spcBef>
-                <a:spcPts val="800"/>
-              </a:spcBef>
-              <a:defRPr sz="1500" b="1">
-                <a:solidFill>
-                  <a:srgbClr val="2563EB"/>
-                </a:solidFill>
-              </a:defRPr>
-            </a:pPr>
-            <a:r>
-              <a:t>[1] Ingestion Layer</a:t>
-            </a:r>
-          </a:p>
-          <a:p>
-            <a:pPr>
-              <a:defRPr sz="1300">
-                <a:solidFill>
-                  <a:srgbClr val="475569"/>
-                </a:solidFill>
-              </a:defRPr>
-            </a:pPr>
-            <a:r>
-              <a:t>Raw telemetry, video feeds, or structured tabular features ingested via secure endpoints.</a:t>
-            </a:r>
-          </a:p>
-          <a:p>
-            <a:pPr>
-              <a:spcBef>
-                <a:spcPts val="800"/>
-              </a:spcBef>
-              <a:defRPr sz="1500" b="1">
-                <a:solidFill>
-                  <a:srgbClr val="2563EB"/>
-                </a:solidFill>
-              </a:defRPr>
-            </a:pPr>
-            <a:r>
-              <a:t>[2] Preprocessing &amp; Normalization</a:t>
-            </a:r>
-          </a:p>
-          <a:p>
-            <a:pPr>
-              <a:defRPr sz="1300">
-                <a:solidFill>
-                  <a:srgbClr val="475569"/>
-                </a:solidFill>
-              </a:defRPr>
-            </a:pPr>
-            <a:r>
-              <a:t>Feature scaling, missing value imputation, winsorization, and tensor reshaping.</a:t>
-            </a:r>
-          </a:p>
-          <a:p>
-            <a:pPr>
-              <a:spcBef>
-                <a:spcPts val="800"/>
-              </a:spcBef>
-              <a:defRPr sz="1500" b="1">
-                <a:solidFill>
-                  <a:srgbClr val="2563EB"/>
-                </a:solidFill>
-              </a:defRPr>
-            </a:pPr>
-            <a:r>
-              <a:t>[3] Deep Neural Inference Engine</a:t>
-            </a:r>
-          </a:p>
-          <a:p>
-            <a:pPr>
-              <a:defRPr sz="1300">
-                <a:solidFill>
-                  <a:srgbClr val="475569"/>
-                </a:solidFill>
-              </a:defRPr>
-            </a:pPr>
-            <a:r>
-              <a:t>Optimized model evaluating representations with GPU/MPS/CPU acceleration.</a:t>
-            </a:r>
-          </a:p>
-          <a:p>
-            <a:pPr>
-              <a:spcBef>
-                <a:spcPts val="800"/>
-              </a:spcBef>
-              <a:defRPr sz="1500" b="1">
-                <a:solidFill>
-                  <a:srgbClr val="2563EB"/>
-                </a:solidFill>
-              </a:defRPr>
-            </a:pPr>
-            <a:r>
-              <a:t>[4] Post-Processing &amp; Decision Support</a:t>
-            </a:r>
-          </a:p>
-          <a:p>
-            <a:pPr>
-              <a:defRPr sz="1300">
-                <a:solidFill>
-                  <a:srgbClr val="475569"/>
-                </a:solidFill>
-              </a:defRPr>
-            </a:pPr>
-            <a:r>
-              <a:t>Threshold calibration, confidence scoring, classification/regression output formatting.</a:t>
-            </a:r>
-          </a:p>
-          <a:p>
-            <a:pPr>
-              <a:spcBef>
-                <a:spcPts val="800"/>
-              </a:spcBef>
-              <a:defRPr sz="1500" b="1">
-                <a:solidFill>
-                  <a:srgbClr val="2563EB"/>
-                </a:solidFill>
-              </a:defRPr>
-            </a:pPr>
-            <a:r>
-              <a:t>[5] Visualization &amp; Persistence</a:t>
-            </a:r>
-          </a:p>
-          <a:p>
-            <a:pPr>
-              <a:defRPr sz="1300">
-                <a:solidFill>
-                  <a:srgbClr val="475569"/>
-                </a:solidFill>
-              </a:defRPr>
-            </a:pPr>
-            <a:r>
-              <a:t>Interactive UI dashboard rendering metrics and SQLite/PostgreSQL audit logging.</a:t>
+        </p:spPr>
+      </p:pic>
+      <p:sp>
+        <p:nvSpPr>
+          <p:cNvPr id="5" name="Rounded Rectangle 4"/>
+          <p:cNvSpPr/>
+          <p:nvPr/>
+        </p:nvSpPr>
+        <p:spPr>
+          <a:xfrm>
+            <a:off x="7772400" y="1463040"/>
+            <a:ext cx="3687775" cy="4846320"/>
+          </a:xfrm>
+          <a:prstGeom prst="roundRect">
+            <a:avLst/>
+          </a:prstGeom>
+          <a:solidFill>
+            <a:srgbClr val="1C2541"/>
+          </a:solidFill>
+          <a:ln>
+            <a:solidFill>
+              <a:srgbClr val="00B4D8"/>
+            </a:solidFill>
+          </a:ln>
+        </p:spPr>
+        <p:style>
+          <a:lnRef idx="1">
+            <a:schemeClr val="accent1"/>
+          </a:lnRef>
+          <a:fillRef idx="3">
+            <a:schemeClr val="accent1"/>
+          </a:fillRef>
+          <a:effectRef idx="2">
+            <a:schemeClr val="accent1"/>
+          </a:effectRef>
+          <a:fontRef idx="minor">
+            <a:schemeClr val="lt1"/>
+          </a:fontRef>
+        </p:style>
+        <p:txBody>
+          <a:bodyPr rtlCol="0" anchor="ctr" wrap="square"/>
+          <a:lstStyle/>
+          <a:p>
+            <a:pPr algn="ctr">
+              <a:spcAft>
+                <a:spcPts val="1200"/>
+              </a:spcAft>
+              <a:defRPr sz="1600" b="1">
+                <a:solidFill>
+                  <a:srgbClr val="00B4D8"/>
+                </a:solidFill>
+              </a:defRPr>
+            </a:pPr>
+            <a:r>
+              <a:t>Operational Insights</a:t>
+            </a:r>
+          </a:p>
+          <a:p>
+            <a:pPr>
+              <a:spcAft>
+                <a:spcPts val="1000"/>
+              </a:spcAft>
+              <a:defRPr sz="1100">
+                <a:solidFill>
+                  <a:srgbClr val="F8FAFC"/>
+                </a:solidFill>
+              </a:defRPr>
+            </a:pPr>
+            <a:r>
+              <a:t>• Comprehensive clinical overview tracking connected biometric sensors and vital telemetry.</a:t>
+            </a:r>
+          </a:p>
+          <a:p>
+            <a:pPr>
+              <a:spcAft>
+                <a:spcPts val="1000"/>
+              </a:spcAft>
+              <a:defRPr sz="1100">
+                <a:solidFill>
+                  <a:srgbClr val="F8FAFC"/>
+                </a:solidFill>
+              </a:defRPr>
+            </a:pPr>
+            <a:r>
+              <a:t>• Visual health cards displaying Heart Rate (bpm), Blood Pressure (mmHg), SpO2 (%), and Respiration Rate.</a:t>
+            </a:r>
+          </a:p>
+          <a:p>
+            <a:pPr>
+              <a:spcAft>
+                <a:spcPts val="1000"/>
+              </a:spcAft>
+              <a:defRPr sz="1100">
+                <a:solidFill>
+                  <a:srgbClr val="F8FAFC"/>
+                </a:solidFill>
+              </a:defRPr>
+            </a:pPr>
+            <a:r>
+              <a:t>• Active system status banner confirming zero simulated scores and genuine 1D CNN connectivity.</a:t>
+            </a:r>
+          </a:p>
+          <a:p>
+            <a:pPr>
+              <a:spcAft>
+                <a:spcPts val="1000"/>
+              </a:spcAft>
+              <a:defRPr sz="1100">
+                <a:solidFill>
+                  <a:srgbClr val="F8FAFC"/>
+                </a:solidFill>
+              </a:defRPr>
+            </a:pPr>
+            <a:r>
+              <a:t>• Recent activity audit log showing chronologically recorded measurements and diagnostic inferences.</a:t>
             </a:r>
           </a:p>
         </p:txBody>
@@ -3961,13 +7325,13 @@
         <p:spPr>
           <a:xfrm>
             <a:off x="0" y="0"/>
-            <a:ext cx="12191695" cy="1097280"/>
+            <a:ext cx="12191695" cy="6858000"/>
           </a:xfrm>
           <a:prstGeom prst="rect">
             <a:avLst/>
           </a:prstGeom>
           <a:solidFill>
-            <a:srgbClr val="0F172A"/>
+            <a:srgbClr val="0B132B"/>
           </a:solidFill>
           <a:ln>
             <a:noFill/>
@@ -4003,8 +7367,8 @@
         </p:nvSpPr>
         <p:spPr>
           <a:xfrm>
-            <a:off x="731520" y="137160"/>
-            <a:ext cx="10698480" cy="822960"/>
+            <a:off x="731520" y="365760"/>
+            <a:ext cx="10728655" cy="1005840"/>
           </a:xfrm>
           <a:prstGeom prst="rect">
             <a:avLst/>
@@ -4018,157 +7382,167 @@
           <a:lstStyle/>
           <a:p>
             <a:pPr>
-              <a:defRPr sz="2400" b="1">
-                <a:solidFill>
-                  <a:srgbClr val="FFFFFF"/>
-                </a:solidFill>
-              </a:defRPr>
-            </a:pPr>
-            <a:r>
-              <a:t>4. Deep Learning &amp; ML Methodology</a:t>
-            </a:r>
-          </a:p>
-          <a:p>
-            <a:pPr>
-              <a:defRPr sz="1100">
-                <a:solidFill>
-                  <a:srgbClr val="94A3B8"/>
-                </a:solidFill>
-              </a:defRPr>
-            </a:pPr>
-            <a:r>
-              <a:t>Academic &amp; Industrial AI Project Series  |  Project 16 of 55</a:t>
-            </a:r>
-          </a:p>
-        </p:txBody>
-      </p:sp>
-      <p:sp>
-        <p:nvSpPr>
-          <p:cNvPr id="4" name="TextBox 3"/>
-          <p:cNvSpPr txBox="1"/>
+              <a:defRPr sz="1100" b="1">
+                <a:solidFill>
+                  <a:srgbClr val="00B4D8"/>
+                </a:solidFill>
+              </a:defRPr>
+            </a:pPr>
+            <a:r>
+              <a:t>PROJECT 16 DEMONSTRATION • LIVE INTERFACE</a:t>
+            </a:r>
+          </a:p>
+          <a:p>
+            <a:pPr>
+              <a:defRPr sz="2200" b="1">
+                <a:solidFill>
+                  <a:srgbClr val="F8FAFC"/>
+                </a:solidFill>
+              </a:defRPr>
+            </a:pPr>
+            <a:r>
+              <a:t>Lead II ECG Ingestion &amp; Waveform Visualization</a:t>
+            </a:r>
+          </a:p>
+        </p:txBody>
+      </p:sp>
+      <p:pic>
+        <p:nvPicPr>
+          <p:cNvPr id="4" name="Picture 3" descr="02_ecg_analysis_upload.png"/>
+          <p:cNvPicPr>
+            <a:picLocks noChangeAspect="1"/>
+          </p:cNvPicPr>
           <p:nvPr/>
-        </p:nvSpPr>
-        <p:spPr>
-          <a:xfrm>
-            <a:off x="731520" y="1371600"/>
-            <a:ext cx="10698480" cy="5029200"/>
+        </p:nvPicPr>
+        <p:blipFill>
+          <a:blip r:embed="rId2"/>
+          <a:stretch>
+            <a:fillRect/>
+          </a:stretch>
+        </p:blipFill>
+        <p:spPr>
+          <a:xfrm>
+            <a:off x="731520" y="1463040"/>
+            <a:ext cx="6858000" cy="4846320"/>
           </a:xfrm>
           <a:prstGeom prst="rect">
             <a:avLst/>
           </a:prstGeom>
-          <a:noFill/>
-        </p:spPr>
-        <p:txBody>
-          <a:bodyPr wrap="square">
-            <a:spAutoFit/>
-          </a:bodyPr>
-          <a:lstStyle/>
-          <a:p>
-            <a:pPr>
-              <a:spcBef>
-                <a:spcPts val="800"/>
-              </a:spcBef>
-              <a:defRPr sz="1500" b="1">
-                <a:solidFill>
-                  <a:srgbClr val="0F172A"/>
-                </a:solidFill>
-              </a:defRPr>
-            </a:pPr>
-            <a:r>
-              <a:t>• Feature Engineering &amp; Dimensionality Alignment</a:t>
-            </a:r>
-          </a:p>
-          <a:p>
-            <a:pPr>
-              <a:defRPr sz="1300">
-                <a:solidFill>
-                  <a:srgbClr val="475569"/>
-                </a:solidFill>
-              </a:defRPr>
-            </a:pPr>
-            <a:r>
-              <a:t>Domain-specific feature extraction, temporal windowing, and embedding vectors.</a:t>
-            </a:r>
-          </a:p>
-          <a:p>
-            <a:pPr>
-              <a:spcBef>
-                <a:spcPts val="800"/>
-              </a:spcBef>
-              <a:defRPr sz="1500" b="1">
-                <a:solidFill>
-                  <a:srgbClr val="0F172A"/>
-                </a:solidFill>
-              </a:defRPr>
-            </a:pPr>
-            <a:r>
-              <a:t>• Model Family &amp; Optimization</a:t>
-            </a:r>
-          </a:p>
-          <a:p>
-            <a:pPr>
-              <a:defRPr sz="1300">
-                <a:solidFill>
-                  <a:srgbClr val="475569"/>
-                </a:solidFill>
-              </a:defRPr>
-            </a:pPr>
-            <a:r>
-              <a:t>Ensemble gradient boosting or deep neural networks trained with AdamW and adaptive LR scheduling.</a:t>
-            </a:r>
-          </a:p>
-          <a:p>
-            <a:pPr>
-              <a:spcBef>
-                <a:spcPts val="800"/>
-              </a:spcBef>
-              <a:defRPr sz="1500" b="1">
-                <a:solidFill>
-                  <a:srgbClr val="0F172A"/>
-                </a:solidFill>
-              </a:defRPr>
-            </a:pPr>
-            <a:r>
-              <a:t>• Overfitting Mitigation</a:t>
-            </a:r>
-          </a:p>
-          <a:p>
-            <a:pPr>
-              <a:defRPr sz="1300">
-                <a:solidFill>
-                  <a:srgbClr val="475569"/>
-                </a:solidFill>
-              </a:defRPr>
-            </a:pPr>
-            <a:r>
-              <a:t>Stratified k-fold cross-validation, dropout layers, early stopping, and data augmentation.</a:t>
-            </a:r>
-          </a:p>
-          <a:p>
-            <a:pPr>
-              <a:spcBef>
-                <a:spcPts val="800"/>
-              </a:spcBef>
-              <a:defRPr sz="1500" b="1">
-                <a:solidFill>
-                  <a:srgbClr val="0F172A"/>
-                </a:solidFill>
-              </a:defRPr>
-            </a:pPr>
-            <a:r>
-              <a:t>• Explainability &amp; Auditability</a:t>
-            </a:r>
-          </a:p>
-          <a:p>
-            <a:pPr>
-              <a:defRPr sz="1300">
-                <a:solidFill>
-                  <a:srgbClr val="475569"/>
-                </a:solidFill>
-              </a:defRPr>
-            </a:pPr>
-            <a:r>
-              <a:t>Confidence scores and feature importance attributions for high-stakes decisions.</a:t>
+        </p:spPr>
+      </p:pic>
+      <p:sp>
+        <p:nvSpPr>
+          <p:cNvPr id="5" name="Rounded Rectangle 4"/>
+          <p:cNvSpPr/>
+          <p:nvPr/>
+        </p:nvSpPr>
+        <p:spPr>
+          <a:xfrm>
+            <a:off x="7772400" y="1463040"/>
+            <a:ext cx="3687775" cy="4846320"/>
+          </a:xfrm>
+          <a:prstGeom prst="roundRect">
+            <a:avLst/>
+          </a:prstGeom>
+          <a:solidFill>
+            <a:srgbClr val="1C2541"/>
+          </a:solidFill>
+          <a:ln>
+            <a:solidFill>
+              <a:srgbClr val="00B4D8"/>
+            </a:solidFill>
+          </a:ln>
+        </p:spPr>
+        <p:style>
+          <a:lnRef idx="1">
+            <a:schemeClr val="accent1"/>
+          </a:lnRef>
+          <a:fillRef idx="3">
+            <a:schemeClr val="accent1"/>
+          </a:fillRef>
+          <a:effectRef idx="2">
+            <a:schemeClr val="accent1"/>
+          </a:effectRef>
+          <a:fontRef idx="minor">
+            <a:schemeClr val="lt1"/>
+          </a:fontRef>
+        </p:style>
+        <p:txBody>
+          <a:bodyPr rtlCol="0" anchor="ctr" wrap="square"/>
+          <a:lstStyle/>
+          <a:p>
+            <a:pPr algn="ctr">
+              <a:spcAft>
+                <a:spcPts val="1200"/>
+              </a:spcAft>
+              <a:defRPr sz="1600" b="1">
+                <a:solidFill>
+                  <a:srgbClr val="00B4D8"/>
+                </a:solidFill>
+              </a:defRPr>
+            </a:pPr>
+            <a:r>
+              <a:t>Operational Insights</a:t>
+            </a:r>
+          </a:p>
+          <a:p>
+            <a:pPr>
+              <a:spcAft>
+                <a:spcPts val="1000"/>
+              </a:spcAft>
+              <a:defRPr sz="1100">
+                <a:solidFill>
+                  <a:srgbClr val="F8FAFC"/>
+                </a:solidFill>
+              </a:defRPr>
+            </a:pPr>
+            <a:r>
+              <a:t>• Multi-format ingestion supporting MIT-BIH benchmark recordings, clinical CSVs, and JSON streams.</a:t>
+            </a:r>
+          </a:p>
+          <a:p>
+            <a:pPr>
+              <a:spcAft>
+                <a:spcPts val="1000"/>
+              </a:spcAft>
+              <a:defRPr sz="1100">
+                <a:solidFill>
+                  <a:srgbClr val="F8FAFC"/>
+                </a:solidFill>
+              </a:defRPr>
+            </a:pPr>
+            <a:r>
+              <a:t>• Integrated Recharts time-series canvas rendering high-fidelity Lead II cardiac waveforms at 360 Hz.</a:t>
+            </a:r>
+          </a:p>
+          <a:p>
+            <a:pPr>
+              <a:spcAft>
+                <a:spcPts val="1000"/>
+              </a:spcAft>
+              <a:defRPr sz="1100">
+                <a:solidFill>
+                  <a:srgbClr val="F8FAFC"/>
+                </a:solidFill>
+              </a:defRPr>
+            </a:pPr>
+            <a:r>
+              <a:t>• Interactive pan and zoom enabling inspection of P-waves, QRS complexes, and T-wave repolarization.</a:t>
+            </a:r>
+          </a:p>
+          <a:p>
+            <a:pPr>
+              <a:spcAft>
+                <a:spcPts val="1000"/>
+              </a:spcAft>
+              <a:defRPr sz="1100">
+                <a:solidFill>
+                  <a:srgbClr val="F8FAFC"/>
+                </a:solidFill>
+              </a:defRPr>
+            </a:pPr>
+            <a:r>
+              <a:t>• Zero-upload data validation rejecting corrupted or non-physiologic inputs before pipeline entry.</a:t>
             </a:r>
           </a:p>
         </p:txBody>
@@ -4200,13 +7574,13 @@
         <p:spPr>
           <a:xfrm>
             <a:off x="0" y="0"/>
-            <a:ext cx="12191695" cy="1097280"/>
+            <a:ext cx="12191695" cy="6858000"/>
           </a:xfrm>
           <a:prstGeom prst="rect">
             <a:avLst/>
           </a:prstGeom>
           <a:solidFill>
-            <a:srgbClr val="0F172A"/>
+            <a:srgbClr val="0B132B"/>
           </a:solidFill>
           <a:ln>
             <a:noFill/>
@@ -4242,8 +7616,8 @@
         </p:nvSpPr>
         <p:spPr>
           <a:xfrm>
-            <a:off x="731520" y="137160"/>
-            <a:ext cx="10698480" cy="822960"/>
+            <a:off x="731520" y="365760"/>
+            <a:ext cx="10728655" cy="1005840"/>
           </a:xfrm>
           <a:prstGeom prst="rect">
             <a:avLst/>
@@ -4257,109 +7631,167 @@
           <a:lstStyle/>
           <a:p>
             <a:pPr>
-              <a:defRPr sz="2400" b="1">
-                <a:solidFill>
-                  <a:srgbClr val="FFFFFF"/>
-                </a:solidFill>
-              </a:defRPr>
-            </a:pPr>
-            <a:r>
-              <a:t>5. Experimental Results &amp; Performance Benchmarks</a:t>
-            </a:r>
-          </a:p>
-          <a:p>
-            <a:pPr>
-              <a:defRPr sz="1100">
-                <a:solidFill>
-                  <a:srgbClr val="94A3B8"/>
-                </a:solidFill>
-              </a:defRPr>
-            </a:pPr>
-            <a:r>
-              <a:t>Academic &amp; Industrial AI Project Series  |  Project 16 of 55</a:t>
-            </a:r>
-          </a:p>
-        </p:txBody>
-      </p:sp>
-      <p:sp>
-        <p:nvSpPr>
-          <p:cNvPr id="4" name="TextBox 3"/>
-          <p:cNvSpPr txBox="1"/>
+              <a:defRPr sz="1100" b="1">
+                <a:solidFill>
+                  <a:srgbClr val="00B4D8"/>
+                </a:solidFill>
+              </a:defRPr>
+            </a:pPr>
+            <a:r>
+              <a:t>PROJECT 16 DEMONSTRATION • LIVE INTERFACE</a:t>
+            </a:r>
+          </a:p>
+          <a:p>
+            <a:pPr>
+              <a:defRPr sz="2200" b="1">
+                <a:solidFill>
+                  <a:srgbClr val="F8FAFC"/>
+                </a:solidFill>
+              </a:defRPr>
+            </a:pPr>
+            <a:r>
+              <a:t>Deep Learning Inference &amp; AAMI Arrhythmia Classification</a:t>
+            </a:r>
+          </a:p>
+        </p:txBody>
+      </p:sp>
+      <p:pic>
+        <p:nvPicPr>
+          <p:cNvPr id="4" name="Picture 3" descr="03_cnn_prediction_results.png"/>
+          <p:cNvPicPr>
+            <a:picLocks noChangeAspect="1"/>
+          </p:cNvPicPr>
           <p:nvPr/>
-        </p:nvSpPr>
-        <p:spPr>
-          <a:xfrm>
-            <a:off x="731520" y="1371600"/>
-            <a:ext cx="10698480" cy="5029200"/>
+        </p:nvPicPr>
+        <p:blipFill>
+          <a:blip r:embed="rId2"/>
+          <a:stretch>
+            <a:fillRect/>
+          </a:stretch>
+        </p:blipFill>
+        <p:spPr>
+          <a:xfrm>
+            <a:off x="731520" y="1463040"/>
+            <a:ext cx="6858000" cy="4846320"/>
           </a:xfrm>
           <a:prstGeom prst="rect">
             <a:avLst/>
           </a:prstGeom>
-          <a:noFill/>
-        </p:spPr>
-        <p:txBody>
-          <a:bodyPr wrap="square">
-            <a:spAutoFit/>
-          </a:bodyPr>
-          <a:lstStyle/>
-          <a:p>
-            <a:pPr>
-              <a:spcBef>
+        </p:spPr>
+      </p:pic>
+      <p:sp>
+        <p:nvSpPr>
+          <p:cNvPr id="5" name="Rounded Rectangle 4"/>
+          <p:cNvSpPr/>
+          <p:nvPr/>
+        </p:nvSpPr>
+        <p:spPr>
+          <a:xfrm>
+            <a:off x="7772400" y="1463040"/>
+            <a:ext cx="3687775" cy="4846320"/>
+          </a:xfrm>
+          <a:prstGeom prst="roundRect">
+            <a:avLst/>
+          </a:prstGeom>
+          <a:solidFill>
+            <a:srgbClr val="1C2541"/>
+          </a:solidFill>
+          <a:ln>
+            <a:solidFill>
+              <a:srgbClr val="00B4D8"/>
+            </a:solidFill>
+          </a:ln>
+        </p:spPr>
+        <p:style>
+          <a:lnRef idx="1">
+            <a:schemeClr val="accent1"/>
+          </a:lnRef>
+          <a:fillRef idx="3">
+            <a:schemeClr val="accent1"/>
+          </a:fillRef>
+          <a:effectRef idx="2">
+            <a:schemeClr val="accent1"/>
+          </a:effectRef>
+          <a:fontRef idx="minor">
+            <a:schemeClr val="lt1"/>
+          </a:fontRef>
+        </p:style>
+        <p:txBody>
+          <a:bodyPr rtlCol="0" anchor="ctr" wrap="square"/>
+          <a:lstStyle/>
+          <a:p>
+            <a:pPr algn="ctr">
+              <a:spcAft>
                 <a:spcPts val="1200"/>
-              </a:spcBef>
-              <a:defRPr sz="1500" b="1">
-                <a:solidFill>
-                  <a:srgbClr val="10B981"/>
-                </a:solidFill>
-              </a:defRPr>
-            </a:pPr>
-            <a:r>
-              <a:t>★ Validation Accuracy / Score: Achieved 94.8% on independent validation test holdout partitions.</a:t>
-            </a:r>
-          </a:p>
-          <a:p>
-            <a:pPr>
-              <a:spcBef>
-                <a:spcPts val="1200"/>
-              </a:spcBef>
-              <a:defRPr sz="1500" b="1">
-                <a:solidFill>
-                  <a:srgbClr val="10B981"/>
-                </a:solidFill>
-              </a:defRPr>
-            </a:pPr>
-            <a:r>
-              <a:t>★ F1-Score / Macro Precision: Balanced metric of 0.932 across positive and negative classification targets.</a:t>
-            </a:r>
-          </a:p>
-          <a:p>
-            <a:pPr>
-              <a:spcBef>
-                <a:spcPts val="1200"/>
-              </a:spcBef>
-              <a:defRPr sz="1500" b="1">
-                <a:solidFill>
-                  <a:srgbClr val="10B981"/>
-                </a:solidFill>
-              </a:defRPr>
-            </a:pPr>
-            <a:r>
-              <a:t>★ Inference Latency Profile: Median latency of 18.4 ms per inference query on edge CPU hardware.</a:t>
-            </a:r>
-          </a:p>
-          <a:p>
-            <a:pPr>
-              <a:spcBef>
-                <a:spcPts val="1200"/>
-              </a:spcBef>
-              <a:defRPr sz="1500" b="1">
-                <a:solidFill>
-                  <a:srgbClr val="10B981"/>
-                </a:solidFill>
-              </a:defRPr>
-            </a:pPr>
-            <a:r>
-              <a:t>★ False Positive Rate (FPR): Maintained below 2.8%, satisfying stringent operational false alarm constraints.</a:t>
+              </a:spcAft>
+              <a:defRPr sz="1600" b="1">
+                <a:solidFill>
+                  <a:srgbClr val="00B4D8"/>
+                </a:solidFill>
+              </a:defRPr>
+            </a:pPr>
+            <a:r>
+              <a:t>Operational Insights</a:t>
+            </a:r>
+          </a:p>
+          <a:p>
+            <a:pPr>
+              <a:spcAft>
+                <a:spcPts val="1000"/>
+              </a:spcAft>
+              <a:defRPr sz="1100">
+                <a:solidFill>
+                  <a:srgbClr val="F8FAFC"/>
+                </a:solidFill>
+              </a:defRPr>
+            </a:pPr>
+            <a:r>
+              <a:t>• Genuine inference results powered by PyTorch Residual 1D CNN model (141,221 parameters).</a:t>
+            </a:r>
+          </a:p>
+          <a:p>
+            <a:pPr>
+              <a:spcAft>
+                <a:spcPts val="1000"/>
+              </a:spcAft>
+              <a:defRPr sz="1100">
+                <a:solidFill>
+                  <a:srgbClr val="F8FAFC"/>
+                </a:solidFill>
+              </a:defRPr>
+            </a:pPr>
+            <a:r>
+              <a:t>• AAMI standard multiclass probability distribution: Normal, Supraventricular, Ventricular, Fusion, Unknown.</a:t>
+            </a:r>
+          </a:p>
+          <a:p>
+            <a:pPr>
+              <a:spcAft>
+                <a:spcPts val="1000"/>
+              </a:spcAft>
+              <a:defRPr sz="1100">
+                <a:solidFill>
+                  <a:srgbClr val="F8FAFC"/>
+                </a:solidFill>
+              </a:defRPr>
+            </a:pPr>
+            <a:r>
+              <a:t>• Detailed clinical explanation: 'Analyzed 6 cardiac cycle(s). Predominant rhythm: Ventricular Ectopic Beat (78.2% confidence)'.</a:t>
+            </a:r>
+          </a:p>
+          <a:p>
+            <a:pPr>
+              <a:spcAft>
+                <a:spcPts val="1000"/>
+              </a:spcAft>
+              <a:defRPr sz="1100">
+                <a:solidFill>
+                  <a:srgbClr val="F8FAFC"/>
+                </a:solidFill>
+              </a:defRPr>
+            </a:pPr>
+            <a:r>
+              <a:t>• Full traceability with model version, latency tracking, and SQLite persistence.</a:t>
             </a:r>
           </a:p>
         </p:txBody>
@@ -4391,13 +7823,13 @@
         <p:spPr>
           <a:xfrm>
             <a:off x="0" y="0"/>
-            <a:ext cx="12191695" cy="1097280"/>
+            <a:ext cx="12191695" cy="6858000"/>
           </a:xfrm>
           <a:prstGeom prst="rect">
             <a:avLst/>
           </a:prstGeom>
           <a:solidFill>
-            <a:srgbClr val="0F172A"/>
+            <a:srgbClr val="0B132B"/>
           </a:solidFill>
           <a:ln>
             <a:noFill/>
@@ -4433,8 +7865,8 @@
         </p:nvSpPr>
         <p:spPr>
           <a:xfrm>
-            <a:off x="731520" y="137160"/>
-            <a:ext cx="10698480" cy="822960"/>
+            <a:off x="731520" y="365760"/>
+            <a:ext cx="10728655" cy="1005840"/>
           </a:xfrm>
           <a:prstGeom prst="rect">
             <a:avLst/>
@@ -4448,157 +7880,167 @@
           <a:lstStyle/>
           <a:p>
             <a:pPr>
-              <a:defRPr sz="2400" b="1">
-                <a:solidFill>
-                  <a:srgbClr val="FFFFFF"/>
-                </a:solidFill>
-              </a:defRPr>
-            </a:pPr>
-            <a:r>
-              <a:t>6. Technology Stack &amp; Production Deployment</a:t>
-            </a:r>
-          </a:p>
-          <a:p>
-            <a:pPr>
-              <a:defRPr sz="1100">
-                <a:solidFill>
-                  <a:srgbClr val="94A3B8"/>
-                </a:solidFill>
-              </a:defRPr>
-            </a:pPr>
-            <a:r>
-              <a:t>Academic &amp; Industrial AI Project Series  |  Project 16 of 55</a:t>
-            </a:r>
-          </a:p>
-        </p:txBody>
-      </p:sp>
-      <p:sp>
-        <p:nvSpPr>
-          <p:cNvPr id="4" name="TextBox 3"/>
-          <p:cNvSpPr txBox="1"/>
+              <a:defRPr sz="1100" b="1">
+                <a:solidFill>
+                  <a:srgbClr val="00B4D8"/>
+                </a:solidFill>
+              </a:defRPr>
+            </a:pPr>
+            <a:r>
+              <a:t>PROJECT 16 DEMONSTRATION • LIVE INTERFACE</a:t>
+            </a:r>
+          </a:p>
+          <a:p>
+            <a:pPr>
+              <a:defRPr sz="2200" b="1">
+                <a:solidFill>
+                  <a:srgbClr val="F8FAFC"/>
+                </a:solidFill>
+              </a:defRPr>
+            </a:pPr>
+            <a:r>
+              <a:t>Patient Biometric Telemetry &amp; Multi-Parameter Trends</a:t>
+            </a:r>
+          </a:p>
+        </p:txBody>
+      </p:sp>
+      <p:pic>
+        <p:nvPicPr>
+          <p:cNvPr id="4" name="Picture 3" descr="04_vitals_monitoring.png"/>
+          <p:cNvPicPr>
+            <a:picLocks noChangeAspect="1"/>
+          </p:cNvPicPr>
           <p:nvPr/>
-        </p:nvSpPr>
-        <p:spPr>
-          <a:xfrm>
-            <a:off x="731520" y="1371600"/>
-            <a:ext cx="10698480" cy="5029200"/>
+        </p:nvPicPr>
+        <p:blipFill>
+          <a:blip r:embed="rId2"/>
+          <a:stretch>
+            <a:fillRect/>
+          </a:stretch>
+        </p:blipFill>
+        <p:spPr>
+          <a:xfrm>
+            <a:off x="731520" y="1463040"/>
+            <a:ext cx="6858000" cy="4846320"/>
           </a:xfrm>
           <a:prstGeom prst="rect">
             <a:avLst/>
           </a:prstGeom>
-          <a:noFill/>
-        </p:spPr>
-        <p:txBody>
-          <a:bodyPr wrap="square">
-            <a:spAutoFit/>
-          </a:bodyPr>
-          <a:lstStyle/>
-          <a:p>
-            <a:pPr>
-              <a:spcBef>
-                <a:spcPts val="800"/>
-              </a:spcBef>
-              <a:defRPr sz="1500" b="1">
-                <a:solidFill>
-                  <a:srgbClr val="1E3A8A"/>
-                </a:solidFill>
-              </a:defRPr>
-            </a:pPr>
-            <a:r>
-              <a:t>⚙ Core Machine Learning Framework</a:t>
-            </a:r>
-          </a:p>
-          <a:p>
-            <a:pPr>
-              <a:defRPr sz="1300">
-                <a:solidFill>
-                  <a:srgbClr val="475569"/>
-                </a:solidFill>
-              </a:defRPr>
-            </a:pPr>
-            <a:r>
-              <a:t>PyTorch 2.0+ / Scikit-learn / HuggingFace Transformers / OpenCV</a:t>
-            </a:r>
-          </a:p>
-          <a:p>
-            <a:pPr>
-              <a:spcBef>
-                <a:spcPts val="800"/>
-              </a:spcBef>
-              <a:defRPr sz="1500" b="1">
-                <a:solidFill>
-                  <a:srgbClr val="1E3A8A"/>
-                </a:solidFill>
-              </a:defRPr>
-            </a:pPr>
-            <a:r>
-              <a:t>⚙ Asynchronous REST Backend</a:t>
-            </a:r>
-          </a:p>
-          <a:p>
-            <a:pPr>
-              <a:defRPr sz="1300">
-                <a:solidFill>
-                  <a:srgbClr val="475569"/>
-                </a:solidFill>
-              </a:defRPr>
-            </a:pPr>
-            <a:r>
-              <a:t>FastAPI / Uvicorn ASGI Server / Pydantic V2 Type Safety</a:t>
-            </a:r>
-          </a:p>
-          <a:p>
-            <a:pPr>
-              <a:spcBef>
-                <a:spcPts val="800"/>
-              </a:spcBef>
-              <a:defRPr sz="1500" b="1">
-                <a:solidFill>
-                  <a:srgbClr val="1E3A8A"/>
-                </a:solidFill>
-              </a:defRPr>
-            </a:pPr>
-            <a:r>
-              <a:t>⚙ Data Persistence &amp; Storage</a:t>
-            </a:r>
-          </a:p>
-          <a:p>
-            <a:pPr>
-              <a:defRPr sz="1300">
-                <a:solidFill>
-                  <a:srgbClr val="475569"/>
-                </a:solidFill>
-              </a:defRPr>
-            </a:pPr>
-            <a:r>
-              <a:t>SQLite / PostgreSQL with transactional integrity &amp; audit trail</a:t>
-            </a:r>
-          </a:p>
-          <a:p>
-            <a:pPr>
-              <a:spcBef>
-                <a:spcPts val="800"/>
-              </a:spcBef>
-              <a:defRPr sz="1500" b="1">
-                <a:solidFill>
-                  <a:srgbClr val="1E3A8A"/>
-                </a:solidFill>
-              </a:defRPr>
-            </a:pPr>
-            <a:r>
-              <a:t>⚙ Interactive Frontend Layer</a:t>
-            </a:r>
-          </a:p>
-          <a:p>
-            <a:pPr>
-              <a:defRPr sz="1300">
-                <a:solidFill>
-                  <a:srgbClr val="475569"/>
-                </a:solidFill>
-              </a:defRPr>
-            </a:pPr>
-            <a:r>
-              <a:t>Modern Responsive Web Portal (HTML5, Tailwind/CSS, JavaScript ES6+)</a:t>
+        </p:spPr>
+      </p:pic>
+      <p:sp>
+        <p:nvSpPr>
+          <p:cNvPr id="5" name="Rounded Rectangle 4"/>
+          <p:cNvSpPr/>
+          <p:nvPr/>
+        </p:nvSpPr>
+        <p:spPr>
+          <a:xfrm>
+            <a:off x="7772400" y="1463040"/>
+            <a:ext cx="3687775" cy="4846320"/>
+          </a:xfrm>
+          <a:prstGeom prst="roundRect">
+            <a:avLst/>
+          </a:prstGeom>
+          <a:solidFill>
+            <a:srgbClr val="1C2541"/>
+          </a:solidFill>
+          <a:ln>
+            <a:solidFill>
+              <a:srgbClr val="00B4D8"/>
+            </a:solidFill>
+          </a:ln>
+        </p:spPr>
+        <p:style>
+          <a:lnRef idx="1">
+            <a:schemeClr val="accent1"/>
+          </a:lnRef>
+          <a:fillRef idx="3">
+            <a:schemeClr val="accent1"/>
+          </a:fillRef>
+          <a:effectRef idx="2">
+            <a:schemeClr val="accent1"/>
+          </a:effectRef>
+          <a:fontRef idx="minor">
+            <a:schemeClr val="lt1"/>
+          </a:fontRef>
+        </p:style>
+        <p:txBody>
+          <a:bodyPr rtlCol="0" anchor="ctr" wrap="square"/>
+          <a:lstStyle/>
+          <a:p>
+            <a:pPr algn="ctr">
+              <a:spcAft>
+                <a:spcPts val="1200"/>
+              </a:spcAft>
+              <a:defRPr sz="1600" b="1">
+                <a:solidFill>
+                  <a:srgbClr val="00B4D8"/>
+                </a:solidFill>
+              </a:defRPr>
+            </a:pPr>
+            <a:r>
+              <a:t>Operational Insights</a:t>
+            </a:r>
+          </a:p>
+          <a:p>
+            <a:pPr>
+              <a:spcAft>
+                <a:spcPts val="1000"/>
+              </a:spcAft>
+              <a:defRPr sz="1100">
+                <a:solidFill>
+                  <a:srgbClr val="F8FAFC"/>
+                </a:solidFill>
+              </a:defRPr>
+            </a:pPr>
+            <a:r>
+              <a:t>• Time-series vital signs tracking demonstrating hemodynamic stability across multi-hour monitoring windows.</a:t>
+            </a:r>
+          </a:p>
+          <a:p>
+            <a:pPr>
+              <a:spcAft>
+                <a:spcPts val="1000"/>
+              </a:spcAft>
+              <a:defRPr sz="1100">
+                <a:solidFill>
+                  <a:srgbClr val="F8FAFC"/>
+                </a:solidFill>
+              </a:defRPr>
+            </a:pPr>
+            <a:r>
+              <a:t>• Automated range validation catching physiological anomalies (e.g., diastolic &gt; systolic, extreme bradycardia).</a:t>
+            </a:r>
+          </a:p>
+          <a:p>
+            <a:pPr>
+              <a:spcAft>
+                <a:spcPts val="1000"/>
+              </a:spcAft>
+              <a:defRPr sz="1100">
+                <a:solidFill>
+                  <a:srgbClr val="F8FAFC"/>
+                </a:solidFill>
+              </a:defRPr>
+            </a:pPr>
+            <a:r>
+              <a:t>• Mean arterial pressure (MAP) calculation and cross-parameter correlation analysis.</a:t>
+            </a:r>
+          </a:p>
+          <a:p>
+            <a:pPr>
+              <a:spcAft>
+                <a:spcPts val="1000"/>
+              </a:spcAft>
+              <a:defRPr sz="1100">
+                <a:solidFill>
+                  <a:srgbClr val="F8FAFC"/>
+                </a:solidFill>
+              </a:defRPr>
+            </a:pPr>
+            <a:r>
+              <a:t>• Exportable telemetry logs for clinical electronic health record (EHR) integration.</a:t>
             </a:r>
           </a:p>
         </p:txBody>
@@ -4630,13 +8072,13 @@
         <p:spPr>
           <a:xfrm>
             <a:off x="0" y="0"/>
-            <a:ext cx="12191695" cy="1097280"/>
+            <a:ext cx="12191695" cy="6858000"/>
           </a:xfrm>
           <a:prstGeom prst="rect">
             <a:avLst/>
           </a:prstGeom>
           <a:solidFill>
-            <a:srgbClr val="0F172A"/>
+            <a:srgbClr val="0B132B"/>
           </a:solidFill>
           <a:ln>
             <a:noFill/>
@@ -4672,8 +8114,8 @@
         </p:nvSpPr>
         <p:spPr>
           <a:xfrm>
-            <a:off x="731520" y="137160"/>
-            <a:ext cx="10698480" cy="822960"/>
+            <a:off x="731520" y="365760"/>
+            <a:ext cx="10728655" cy="1005840"/>
           </a:xfrm>
           <a:prstGeom prst="rect">
             <a:avLst/>
@@ -4687,40 +8129,242 @@
           <a:lstStyle/>
           <a:p>
             <a:pPr>
-              <a:defRPr sz="2400" b="1">
-                <a:solidFill>
-                  <a:srgbClr val="FFFFFF"/>
-                </a:solidFill>
-              </a:defRPr>
-            </a:pPr>
-            <a:r>
-              <a:t>7. Conclusion &amp; Future Roadmap</a:t>
-            </a:r>
-          </a:p>
-          <a:p>
-            <a:pPr>
+              <a:defRPr sz="1100" b="1">
+                <a:solidFill>
+                  <a:srgbClr val="00B4D8"/>
+                </a:solidFill>
+              </a:defRPr>
+            </a:pPr>
+            <a:r>
+              <a:t>PROJECT 16 DEMONSTRATION • LIVE INTERFACE</a:t>
+            </a:r>
+          </a:p>
+          <a:p>
+            <a:pPr>
+              <a:defRPr sz="2200" b="1">
+                <a:solidFill>
+                  <a:srgbClr val="F8FAFC"/>
+                </a:solidFill>
+              </a:defRPr>
+            </a:pPr>
+            <a:r>
+              <a:t>Evidence-Based Clinical Decision Support System</a:t>
+            </a:r>
+          </a:p>
+        </p:txBody>
+      </p:sp>
+      <p:pic>
+        <p:nvPicPr>
+          <p:cNvPr id="4" name="Picture 3" descr="05_clinical_recommendations.png"/>
+          <p:cNvPicPr>
+            <a:picLocks noChangeAspect="1"/>
+          </p:cNvPicPr>
+          <p:nvPr/>
+        </p:nvPicPr>
+        <p:blipFill>
+          <a:blip r:embed="rId2"/>
+          <a:stretch>
+            <a:fillRect/>
+          </a:stretch>
+        </p:blipFill>
+        <p:spPr>
+          <a:xfrm>
+            <a:off x="731520" y="1463040"/>
+            <a:ext cx="6858000" cy="4846320"/>
+          </a:xfrm>
+          <a:prstGeom prst="rect">
+            <a:avLst/>
+          </a:prstGeom>
+        </p:spPr>
+      </p:pic>
+      <p:sp>
+        <p:nvSpPr>
+          <p:cNvPr id="5" name="Rounded Rectangle 4"/>
+          <p:cNvSpPr/>
+          <p:nvPr/>
+        </p:nvSpPr>
+        <p:spPr>
+          <a:xfrm>
+            <a:off x="7772400" y="1463040"/>
+            <a:ext cx="3687775" cy="4846320"/>
+          </a:xfrm>
+          <a:prstGeom prst="roundRect">
+            <a:avLst/>
+          </a:prstGeom>
+          <a:solidFill>
+            <a:srgbClr val="1C2541"/>
+          </a:solidFill>
+          <a:ln>
+            <a:solidFill>
+              <a:srgbClr val="00B4D8"/>
+            </a:solidFill>
+          </a:ln>
+        </p:spPr>
+        <p:style>
+          <a:lnRef idx="1">
+            <a:schemeClr val="accent1"/>
+          </a:lnRef>
+          <a:fillRef idx="3">
+            <a:schemeClr val="accent1"/>
+          </a:fillRef>
+          <a:effectRef idx="2">
+            <a:schemeClr val="accent1"/>
+          </a:effectRef>
+          <a:fontRef idx="minor">
+            <a:schemeClr val="lt1"/>
+          </a:fontRef>
+        </p:style>
+        <p:txBody>
+          <a:bodyPr rtlCol="0" anchor="ctr" wrap="square"/>
+          <a:lstStyle/>
+          <a:p>
+            <a:pPr algn="ctr">
+              <a:spcAft>
+                <a:spcPts val="1200"/>
+              </a:spcAft>
+              <a:defRPr sz="1600" b="1">
+                <a:solidFill>
+                  <a:srgbClr val="00B4D8"/>
+                </a:solidFill>
+              </a:defRPr>
+            </a:pPr>
+            <a:r>
+              <a:t>Operational Insights</a:t>
+            </a:r>
+          </a:p>
+          <a:p>
+            <a:pPr>
+              <a:spcAft>
+                <a:spcPts val="1000"/>
+              </a:spcAft>
               <a:defRPr sz="1100">
                 <a:solidFill>
-                  <a:srgbClr val="94A3B8"/>
-                </a:solidFill>
-              </a:defRPr>
-            </a:pPr>
-            <a:r>
-              <a:t>Academic &amp; Industrial AI Project Series  |  Project 16 of 55</a:t>
-            </a:r>
-          </a:p>
-        </p:txBody>
-      </p:sp>
-      <p:sp>
-        <p:nvSpPr>
-          <p:cNvPr id="4" name="TextBox 3"/>
+                  <a:srgbClr val="F8FAFC"/>
+                </a:solidFill>
+              </a:defRPr>
+            </a:pPr>
+            <a:r>
+              <a:t>• Dynamic recommendation engine categorizing interventions into Lifestyle, Diagnostic, and Medication.</a:t>
+            </a:r>
+          </a:p>
+          <a:p>
+            <a:pPr>
+              <a:spcAft>
+                <a:spcPts val="1000"/>
+              </a:spcAft>
+              <a:defRPr sz="1100">
+                <a:solidFill>
+                  <a:srgbClr val="F8FAFC"/>
+                </a:solidFill>
+              </a:defRPr>
+            </a:pPr>
+            <a:r>
+              <a:t>• Cardiovascular risk-stratified guidance triggered by high PVC frequency or ST-segment deviations.</a:t>
+            </a:r>
+          </a:p>
+          <a:p>
+            <a:pPr>
+              <a:spcAft>
+                <a:spcPts val="1000"/>
+              </a:spcAft>
+              <a:defRPr sz="1100">
+                <a:solidFill>
+                  <a:srgbClr val="F8FAFC"/>
+                </a:solidFill>
+              </a:defRPr>
+            </a:pPr>
+            <a:r>
+              <a:t>• Peer-reviewed clinical rules emphasizing non-invasive confirmation prior to medical escalation.</a:t>
+            </a:r>
+          </a:p>
+          <a:p>
+            <a:pPr>
+              <a:spcAft>
+                <a:spcPts val="1000"/>
+              </a:spcAft>
+              <a:defRPr sz="1100">
+                <a:solidFill>
+                  <a:srgbClr val="F8FAFC"/>
+                </a:solidFill>
+              </a:defRPr>
+            </a:pPr>
+            <a:r>
+              <a:t>• Full physician oversight workflow allowing clinician review, acknowledgment, and override.</a:t>
+            </a:r>
+          </a:p>
+        </p:txBody>
+      </p:sp>
+    </p:spTree>
+  </p:cSld>
+  <p:clrMapOvr>
+    <a:masterClrMapping/>
+  </p:clrMapOvr>
+</p:sld>
+</file>
+
+<file path=ppt/slides/slide9.xml><?xml version="1.0" encoding="utf-8"?>
+<p:sld xmlns:a="http://schemas.openxmlformats.org/drawingml/2006/main" xmlns:p="http://schemas.openxmlformats.org/presentationml/2006/main" xmlns:r="http://schemas.openxmlformats.org/officeDocument/2006/relationships">
+  <p:cSld>
+    <p:spTree>
+      <p:nvGrpSpPr>
+        <p:cNvPr id="1" name=""/>
+        <p:cNvGrpSpPr/>
+        <p:nvPr/>
+      </p:nvGrpSpPr>
+      <p:grpSpPr/>
+      <p:sp>
+        <p:nvSpPr>
+          <p:cNvPr id="2" name="Rectangle 1"/>
+          <p:cNvSpPr/>
+          <p:nvPr/>
+        </p:nvSpPr>
+        <p:spPr>
+          <a:xfrm>
+            <a:off x="0" y="0"/>
+            <a:ext cx="12191695" cy="6858000"/>
+          </a:xfrm>
+          <a:prstGeom prst="rect">
+            <a:avLst/>
+          </a:prstGeom>
+          <a:solidFill>
+            <a:srgbClr val="0B132B"/>
+          </a:solidFill>
+          <a:ln>
+            <a:noFill/>
+          </a:ln>
+        </p:spPr>
+        <p:style>
+          <a:lnRef idx="1">
+            <a:schemeClr val="accent1"/>
+          </a:lnRef>
+          <a:fillRef idx="3">
+            <a:schemeClr val="accent1"/>
+          </a:fillRef>
+          <a:effectRef idx="2">
+            <a:schemeClr val="accent1"/>
+          </a:effectRef>
+          <a:fontRef idx="minor">
+            <a:schemeClr val="lt1"/>
+          </a:fontRef>
+        </p:style>
+        <p:txBody>
+          <a:bodyPr rtlCol="0" anchor="ctr"/>
+          <a:lstStyle/>
+          <a:p>
+            <a:pPr algn="ctr"/>
+          </a:p>
+        </p:txBody>
+      </p:sp>
+      <p:sp>
+        <p:nvSpPr>
+          <p:cNvPr id="3" name="TextBox 2"/>
           <p:cNvSpPr txBox="1"/>
           <p:nvPr/>
         </p:nvSpPr>
         <p:spPr>
           <a:xfrm>
-            <a:off x="731520" y="1371600"/>
-            <a:ext cx="10698480" cy="5029200"/>
+            <a:off x="731520" y="365760"/>
+            <a:ext cx="10728655" cy="1005840"/>
           </a:xfrm>
           <a:prstGeom prst="rect">
             <a:avLst/>
@@ -4734,83 +8378,167 @@
           <a:lstStyle/>
           <a:p>
             <a:pPr>
-              <a:spcBef>
+              <a:defRPr sz="1100" b="1">
+                <a:solidFill>
+                  <a:srgbClr val="00B4D8"/>
+                </a:solidFill>
+              </a:defRPr>
+            </a:pPr>
+            <a:r>
+              <a:t>PROJECT 16 DEMONSTRATION • LIVE INTERFACE</a:t>
+            </a:r>
+          </a:p>
+          <a:p>
+            <a:pPr>
+              <a:defRPr sz="2200" b="1">
+                <a:solidFill>
+                  <a:srgbClr val="F8FAFC"/>
+                </a:solidFill>
+              </a:defRPr>
+            </a:pPr>
+            <a:r>
+              <a:t>Diagnostic Summary &amp; Critical Alert Management</a:t>
+            </a:r>
+          </a:p>
+        </p:txBody>
+      </p:sp>
+      <p:pic>
+        <p:nvPicPr>
+          <p:cNvPr id="4" name="Picture 3" descr="06_diagnostic_reports.png"/>
+          <p:cNvPicPr>
+            <a:picLocks noChangeAspect="1"/>
+          </p:cNvPicPr>
+          <p:nvPr/>
+        </p:nvPicPr>
+        <p:blipFill>
+          <a:blip r:embed="rId2"/>
+          <a:stretch>
+            <a:fillRect/>
+          </a:stretch>
+        </p:blipFill>
+        <p:spPr>
+          <a:xfrm>
+            <a:off x="731520" y="1463040"/>
+            <a:ext cx="6858000" cy="4846320"/>
+          </a:xfrm>
+          <a:prstGeom prst="rect">
+            <a:avLst/>
+          </a:prstGeom>
+        </p:spPr>
+      </p:pic>
+      <p:sp>
+        <p:nvSpPr>
+          <p:cNvPr id="5" name="Rounded Rectangle 4"/>
+          <p:cNvSpPr/>
+          <p:nvPr/>
+        </p:nvSpPr>
+        <p:spPr>
+          <a:xfrm>
+            <a:off x="7772400" y="1463040"/>
+            <a:ext cx="3687775" cy="4846320"/>
+          </a:xfrm>
+          <a:prstGeom prst="roundRect">
+            <a:avLst/>
+          </a:prstGeom>
+          <a:solidFill>
+            <a:srgbClr val="1C2541"/>
+          </a:solidFill>
+          <a:ln>
+            <a:solidFill>
+              <a:srgbClr val="00B4D8"/>
+            </a:solidFill>
+          </a:ln>
+        </p:spPr>
+        <p:style>
+          <a:lnRef idx="1">
+            <a:schemeClr val="accent1"/>
+          </a:lnRef>
+          <a:fillRef idx="3">
+            <a:schemeClr val="accent1"/>
+          </a:fillRef>
+          <a:effectRef idx="2">
+            <a:schemeClr val="accent1"/>
+          </a:effectRef>
+          <a:fontRef idx="minor">
+            <a:schemeClr val="lt1"/>
+          </a:fontRef>
+        </p:style>
+        <p:txBody>
+          <a:bodyPr rtlCol="0" anchor="ctr" wrap="square"/>
+          <a:lstStyle/>
+          <a:p>
+            <a:pPr algn="ctr">
+              <a:spcAft>
+                <a:spcPts val="1200"/>
+              </a:spcAft>
+              <a:defRPr sz="1600" b="1">
+                <a:solidFill>
+                  <a:srgbClr val="00B4D8"/>
+                </a:solidFill>
+              </a:defRPr>
+            </a:pPr>
+            <a:r>
+              <a:t>Operational Insights</a:t>
+            </a:r>
+          </a:p>
+          <a:p>
+            <a:pPr>
+              <a:spcAft>
                 <a:spcPts val="1000"/>
-              </a:spcBef>
-              <a:defRPr sz="1500" b="1">
-                <a:solidFill>
-                  <a:srgbClr val="0F172A"/>
-                </a:solidFill>
-              </a:defRPr>
-            </a:pPr>
-            <a:r>
-              <a:t>■ Project Accomplishments</a:t>
-            </a:r>
-          </a:p>
-          <a:p>
-            <a:pPr>
-              <a:defRPr sz="1300">
-                <a:solidFill>
-                  <a:srgbClr val="475569"/>
-                </a:solidFill>
-              </a:defRPr>
-            </a:pPr>
-            <a:r>
-              <a:t>Engineered a robust, end-to-end prototype validating the initial abstract with reproducible experiments.</a:t>
-            </a:r>
-          </a:p>
-          <a:p>
-            <a:pPr>
-              <a:spcBef>
+              </a:spcAft>
+              <a:defRPr sz="1100">
+                <a:solidFill>
+                  <a:srgbClr val="F8FAFC"/>
+                </a:solidFill>
+              </a:defRPr>
+            </a:pPr>
+            <a:r>
+              <a:t>• Consolidated patient health report summarizing 24-hour vital trends, arrhythmia burden, and risk level.</a:t>
+            </a:r>
+          </a:p>
+          <a:p>
+            <a:pPr>
+              <a:spcAft>
                 <a:spcPts val="1000"/>
-              </a:spcBef>
-              <a:defRPr sz="1500" b="1">
-                <a:solidFill>
-                  <a:srgbClr val="0F172A"/>
-                </a:solidFill>
-              </a:defRPr>
-            </a:pPr>
-            <a:r>
-              <a:t>■ Industrial Significance</a:t>
-            </a:r>
-          </a:p>
-          <a:p>
-            <a:pPr>
-              <a:defRPr sz="1300">
-                <a:solidFill>
-                  <a:srgbClr val="475569"/>
-                </a:solidFill>
-              </a:defRPr>
-            </a:pPr>
-            <a:r>
-              <a:t>Eliminates latency and manual friction while ensuring high confidence automated decision support.</a:t>
-            </a:r>
-          </a:p>
-          <a:p>
-            <a:pPr>
-              <a:spcBef>
+              </a:spcAft>
+              <a:defRPr sz="1100">
+                <a:solidFill>
+                  <a:srgbClr val="F8FAFC"/>
+                </a:solidFill>
+              </a:defRPr>
+            </a:pPr>
+            <a:r>
+              <a:t>• Color-coded clinical alert queue categorizing events into Warning, Critical, and Informational tiers.</a:t>
+            </a:r>
+          </a:p>
+          <a:p>
+            <a:pPr>
+              <a:spcAft>
                 <a:spcPts val="1000"/>
-              </a:spcBef>
-              <a:defRPr sz="1500" b="1">
-                <a:solidFill>
-                  <a:srgbClr val="0F172A"/>
-                </a:solidFill>
-              </a:defRPr>
-            </a:pPr>
-            <a:r>
-              <a:t>■ Future Scope &amp; Extensions</a:t>
-            </a:r>
-          </a:p>
-          <a:p>
-            <a:pPr>
-              <a:defRPr sz="1300">
-                <a:solidFill>
-                  <a:srgbClr val="475569"/>
-                </a:solidFill>
-              </a:defRPr>
-            </a:pPr>
-            <a:r>
-              <a:t>Integration with federated edge sensors, distributed multi-tenant cloud clustering, and automated active learning.</a:t>
+              </a:spcAft>
+              <a:defRPr sz="1100">
+                <a:solidFill>
+                  <a:srgbClr val="F8FAFC"/>
+                </a:solidFill>
+              </a:defRPr>
+            </a:pPr>
+            <a:r>
+              <a:t>• Real-time alert dispatch notifying healthcare providers of sudden tachycardia or ventricular arrhythmias.</a:t>
+            </a:r>
+          </a:p>
+          <a:p>
+            <a:pPr>
+              <a:spcAft>
+                <a:spcPts val="1000"/>
+              </a:spcAft>
+              <a:defRPr sz="1100">
+                <a:solidFill>
+                  <a:srgbClr val="F8FAFC"/>
+                </a:solidFill>
+              </a:defRPr>
+            </a:pPr>
+            <a:r>
+              <a:t>• Audit trail capturing timestamped clinician acknowledgment for medical accountability.</a:t>
             </a:r>
           </a:p>
         </p:txBody>
